--- a/en/slides/14-Computer_Architecture-Registers_and_Buses.pptx
+++ b/en/slides/14-Computer_Architecture-Registers_and_Buses.pptx
@@ -126,19 +126,19 @@
   <p:extLst>
     <p:ext uri="{521415D9-36F7-43E2-AB2F-B90AF26B5E84}">
       <p14:sectionLst xmlns:p14="http://schemas.microsoft.com/office/powerpoint/2010/main">
-        <p14:section name="Opening" id="{689b8e42-17ab-8f2c-aa19-5453834bb103}">
+        <p14:section name="Opening" id="{b5be9866-6e9d-f1d2-7f1f-bd0a75b50fed}">
           <p14:sldIdLst>
             <p14:sldId id="256"/>
             <p14:sldId id="257"/>
           </p14:sldIdLst>
         </p14:section>
-        <p14:section name="Word gates and registers" id="{2bc7d202-6507-95f1-7c5b-180c4a5e072a}">
+        <p14:section name="Word gates and registers" id="{063ac92f-da05-11df-aa04-d85a5174ee08}">
           <p14:sldIdLst>
             <p14:sldId id="258"/>
             <p14:sldId id="259"/>
           </p14:sldIdLst>
         </p14:section>
-        <p14:section name="Buses" id="{ef21ac4f-3b87-2778-28ed-d99779695038}">
+        <p14:section name="Buses" id="{3ea2e132-2bea-5c80-89eb-00fa05cbd014}">
           <p14:sldIdLst>
             <p14:sldId id="260"/>
             <p14:sldId id="261"/>
@@ -146,14 +146,14 @@
             <p14:sldId id="263"/>
           </p14:sldIdLst>
         </p14:section>
-        <p14:section name="Three-state buffers" id="{bdd052f0-3f22-4272-afa7-2724ba191529}">
+        <p14:section name="Three-state buffers" id="{ba81ce80-c90e-0a6a-ed30-1e01cd30fc91}">
           <p14:sldIdLst>
             <p14:sldId id="264"/>
             <p14:sldId id="265"/>
             <p14:sldId id="266"/>
           </p14:sldIdLst>
         </p14:section>
-        <p14:section name="Shift registers" id="{f803693f-c9db-7772-10cd-b1d7cf0477a2}">
+        <p14:section name="Shift registers" id="{6886d08d-571b-f88c-e8b9-c42307b46965}">
           <p14:sldIdLst>
             <p14:sldId id="267"/>
             <p14:sldId id="268"/>
@@ -162,7 +162,7 @@
             <p14:sldId id="271"/>
           </p14:sldIdLst>
         </p14:section>
-        <p14:section name="Back to the machine" id="{835ae4ec-1033-1482-7f26-5bee4143a138}">
+        <p14:section name="Back to the machine" id="{41f70ae5-a079-a93e-59a8-8521b931243f}">
           <p14:sldIdLst>
             <p14:sldId id="272"/>
             <p14:sldId id="273"/>
@@ -1821,7 +1821,8 @@
             <a:r>
               <a:rPr lang="en-US" dirty="0"/>
               <a:t>A register stores a group of bits: in its simplest form it is a group of flip-flops with a common clock. The classic example in one chip is the 74273, with eight D flip-flops, one clock and one clear. Loading a register means storing the datum present on its inputs, and it happens when the load signal is active, normally in step with the clock. Each of the registers x1 to x31 of RISC-V is thirty-two such flip-flops.
-For the lecturer: Datasheet: ti.com/lit/ds/symlink/sn74ls273.pdf. The 7474 holds two D flip-flops with preset and clear. See Lecture 13 for the flip-flop itself.</a:t>
+For the lecturer: Datasheet: ti.com/lit/ds/symlink/sn74ls273.pdf. The 7474 holds two D flip-flops with preset and clear. See Lecture 13 for the flip-flop itself.
+Pictures: Animation Technologies LifeView LR25 - Hitachi LS273-2523.jpg, Raimond Spekking, CC BY-SA 4.0, Wikimedia Commons.</a:t>
             </a:r>
             <a:endParaRPr lang="en-US" dirty="0"/>
           </a:p>
@@ -2088,7 +2089,8 @@
             <a:r>
               <a:rPr lang="en-US" dirty="0"/>
               <a:t>A transfer can be parallel, with the n bits travelling together on n lines in one step, or serial, with the bits travelling one after another on a single line in n steps, or a mixture, for example one byte at a time. Remember the last line: inside a chip buses are parallel; between chips and between machines they are today almost always serial, because at very high speed it is easier to keep one line clean than thirty-two lines in step.
-For the lecturer: USB, SATA, PCI Express, HDMI and Ethernet are all serial: at very high speeds it is easier to keep one fast line clean than to keep thirty-two lines in step.</a:t>
+For the lecturer: USB, SATA, PCI Express, HDMI and Ethernet are all serial: at very high speeds it is easier to keep one fast line clean than to keep thirty-two lines in step.
+Pictures: Hand Etched PCB.png, Tpdwkouaa, CC BY-SA 4.0, Wikimedia Commons.</a:t>
             </a:r>
             <a:endParaRPr lang="en-US" dirty="0"/>
           </a:p>
@@ -3296,7 +3298,63 @@
       </p:sp>
       <p:sp>
         <p:nvSpPr>
-          <p:cNvPr id="12" name="Shape 10"/>
+          <p:cNvPr id="12" name="Text 10"/>
+          <p:cNvSpPr txBox="1"/>
+          <p:nvPr/>
+        </p:nvSpPr>
+        <p:spPr>
+          <a:xfrm>
+            <a:off x="4693615" y="566928"/>
+            <a:ext cx="6949440" cy="640080"/>
+          </a:xfrm>
+          <a:prstGeom prst="rect">
+            <a:avLst/>
+          </a:prstGeom>
+          <a:noFill/>
+          <a:ln/>
+        </p:spPr>
+        <p:txBody>
+          <a:bodyPr wrap="square" lIns="0" tIns="0" rIns="0" bIns="0" rtlCol="0" anchor="t"/>
+          <a:lstStyle/>
+          <a:p>
+            <a:pPr algn="r" indent="0" marL="0">
+              <a:buNone/>
+            </a:pPr>
+            <a:r>
+              <a:rPr lang="en-US" sz="1300" dirty="0">
+                <a:solidFill>
+                  <a:srgbClr val="CFE3EA"/>
+                </a:solidFill>
+                <a:latin typeface="Calibri" pitchFamily="34" charset="0"/>
+                <a:ea typeface="Calibri" pitchFamily="34" charset="-122"/>
+                <a:cs typeface="Calibri" pitchFamily="34" charset="-120"/>
+              </a:rPr>
+              <a:t>Lecture deck. The listings, the complete program and how to test it are in the code deck:</a:t>
+            </a:r>
+            <a:endParaRPr lang="en-US" sz="1300" dirty="0"/>
+          </a:p>
+          <a:p>
+            <a:pPr algn="r" indent="0" marL="0">
+              <a:buNone/>
+            </a:pPr>
+            <a:r>
+              <a:rPr lang="en-US" sz="1300" dirty="0">
+                <a:solidFill>
+                  <a:srgbClr val="CFE3EA"/>
+                </a:solidFill>
+                <a:latin typeface="Calibri" pitchFamily="34" charset="0"/>
+                <a:ea typeface="Calibri" pitchFamily="34" charset="-122"/>
+                <a:cs typeface="Calibri" pitchFamily="34" charset="-120"/>
+              </a:rPr>
+              <a:t>14-Computer_Architecture-Registers_and_Buses-Code.pptx</a:t>
+            </a:r>
+            <a:endParaRPr lang="en-US" sz="1300" dirty="0"/>
+          </a:p>
+        </p:txBody>
+      </p:sp>
+      <p:sp>
+        <p:nvSpPr>
+          <p:cNvPr id="13" name="Shape 11"/>
           <p:cNvSpPr/>
           <p:nvPr/>
         </p:nvSpPr>
@@ -3323,7 +3381,7 @@
       </p:sp>
       <p:pic>
         <p:nvPicPr>
-          <p:cNvPr id="13" name="Image 0" descr="/Users/raffaelemontella/devel/riscv-prg32/computer-architecture-with-prg32/tools/assets/menu_main.png">    </p:cNvPr>
+          <p:cNvPr id="14" name="Image 0" descr="/Users/raffaelemontella/devel/riscv-prg32/computer-architecture-with-prg32/tools/assets/menu_main.png">    </p:cNvPr>
           <p:cNvPicPr>
             <a:picLocks noChangeAspect="1"/>
           </p:cNvPicPr>
@@ -15325,8 +15383,8 @@
         </p:blipFill>
         <p:spPr>
           <a:xfrm>
-            <a:off x="7863840" y="1978890"/>
-            <a:ext cx="3779215" cy="3174541"/>
+            <a:off x="7863840" y="2148954"/>
+            <a:ext cx="3779215" cy="2834411"/>
           </a:xfrm>
           <a:prstGeom prst="rect">
             <a:avLst/>
@@ -15366,7 +15424,7 @@
                 <a:ea typeface="Calibri" pitchFamily="34" charset="-122"/>
                 <a:cs typeface="Calibri" pitchFamily="34" charset="-120"/>
               </a:rPr>
-              <a:t>SN74LS273: eight D flip-flops with a common clock</a:t>
+              <a:t>A 74LS273 on a board: eight D flip-flops with a common clock</a:t>
             </a:r>
             <a:endParaRPr lang="en-US" sz="1200" dirty="0"/>
           </a:p>
@@ -16710,8 +16768,8 @@
         </p:blipFill>
         <p:spPr>
           <a:xfrm>
-            <a:off x="7863840" y="2230837"/>
-            <a:ext cx="3779215" cy="2670645"/>
+            <a:off x="7863840" y="1846322"/>
+            <a:ext cx="3779215" cy="3439676"/>
           </a:xfrm>
           <a:prstGeom prst="rect">
             <a:avLst/>
@@ -16751,7 +16809,7 @@
                 <a:ea typeface="Calibri" pitchFamily="34" charset="-122"/>
                 <a:cs typeface="Calibri" pitchFamily="34" charset="-120"/>
               </a:rPr>
-              <a:t>Bus lines on a printed circuit board</a:t>
+              <a:t>Copper tracks on a printed circuit board</a:t>
             </a:r>
             <a:endParaRPr lang="en-US" sz="1200" dirty="0"/>
           </a:p>

--- a/en/slides/14-Computer_Architecture-Registers_and_Buses.pptx
+++ b/en/slides/14-Computer_Architecture-Registers_and_Buses.pptx
@@ -126,19 +126,19 @@
   <p:extLst>
     <p:ext uri="{521415D9-36F7-43E2-AB2F-B90AF26B5E84}">
       <p14:sectionLst xmlns:p14="http://schemas.microsoft.com/office/powerpoint/2010/main">
-        <p14:section name="Opening" id="{b5be9866-6e9d-f1d2-7f1f-bd0a75b50fed}">
+        <p14:section name="Opening" id="{df8ddb8b-0500-44d7-9e39-90e955afd706}">
           <p14:sldIdLst>
             <p14:sldId id="256"/>
             <p14:sldId id="257"/>
           </p14:sldIdLst>
         </p14:section>
-        <p14:section name="Word gates and registers" id="{063ac92f-da05-11df-aa04-d85a5174ee08}">
+        <p14:section name="Word gates and registers" id="{a4530b8d-f023-13f8-add2-b0ed947e783e}">
           <p14:sldIdLst>
             <p14:sldId id="258"/>
             <p14:sldId id="259"/>
           </p14:sldIdLst>
         </p14:section>
-        <p14:section name="Buses" id="{3ea2e132-2bea-5c80-89eb-00fa05cbd014}">
+        <p14:section name="Buses" id="{f4db129f-4b5a-c844-7c71-8cb629fcb13c}">
           <p14:sldIdLst>
             <p14:sldId id="260"/>
             <p14:sldId id="261"/>
@@ -146,14 +146,14 @@
             <p14:sldId id="263"/>
           </p14:sldIdLst>
         </p14:section>
-        <p14:section name="Three-state buffers" id="{ba81ce80-c90e-0a6a-ed30-1e01cd30fc91}">
+        <p14:section name="Three-state buffers" id="{08bd7e5d-ddec-260f-449b-14ae4f24b0cb}">
           <p14:sldIdLst>
             <p14:sldId id="264"/>
             <p14:sldId id="265"/>
             <p14:sldId id="266"/>
           </p14:sldIdLst>
         </p14:section>
-        <p14:section name="Shift registers" id="{6886d08d-571b-f88c-e8b9-c42307b46965}">
+        <p14:section name="Shift registers" id="{7fb7ed0d-5346-81c4-2240-5ccd804ab5ef}">
           <p14:sldIdLst>
             <p14:sldId id="267"/>
             <p14:sldId id="268"/>
@@ -162,7 +162,7 @@
             <p14:sldId id="271"/>
           </p14:sldIdLst>
         </p14:section>
-        <p14:section name="Back to the machine" id="{41f70ae5-a079-a93e-59a8-8521b931243f}">
+        <p14:section name="Back to the machine" id="{eec1a4ed-a44c-d9d2-7e76-ceae91651bc6}">
           <p14:sldIdLst>
             <p14:sldId id="272"/>
             <p14:sldId id="273"/>
@@ -575,6 +575,8 @@
             <a:r>
               <a:rPr lang="en-US" dirty="0"/>
               <a:t>The previous lecture built a register out of flip-flops. This one asks how registers talk to each other: how a word goes from one to another, along which wires, and what happens when many registers share the same wires. The answers are the bus, the three-state buffer and the shift register. Doc Brown's line on the cover is ironic here: data do need roads, and a bus is exactly that. The warm-up starts from a fact about the kit: its display receives every pixel one bit at a time.
+Learning status: UNDERSTAND NOW, by the end of this lecture you explain it, trace it and apply it on your own; USE NOW, you follow and use the recipe today; how it works inside is explained later, or is not part of the course; UNDERSTAND LATER, recognise the name and what it is for; a later lecture explains it. A slide without a badge is context: a story, an example, a question, an exercise.
+Learning status of this lecture. UNDERSTAND NOW: shift registers; registers as flip-flops; buses and three-state gates. USE NOW: the complete program, the PRG32 tools (used, not studied, in this course). UNDERSTAND LATER: memory-mapped I/O (Lecture 15); memories and addresses (Lecture 15). A slide without a badge is context: a story, an example, a question, an exercise.
 For the lecturer: Spiral: the display of the PRG32 kit receives every pixel one bit at a time; the warm-up sends a byte serially in assembly, and the lecture builds the machines that do it in hardware.</a:t>
             </a:r>
             <a:endParaRPr lang="en-US" dirty="0"/>
@@ -664,6 +666,7 @@
             <a:r>
               <a:rPr lang="en-US" dirty="0"/>
               <a:t>Applied to a whole word, a three-state gate lets a bus through or disconnects it: when the enable is active the output bus reproduces the input bus; otherwise all its lines are at high impedance. The pins of the chip of the kit work in this way: each can be configured as an output, which drives the wire, or released and used as an input. The joystick pins are inputs; the display pins are outputs.
+UNDERSTAND NOW: buses and three-state gates.
 For the lecturer: Tristate di parola. On the kit, the joystick pins are configured as inputs (their output buffers in high impedance) and the display pins as outputs.</a:t>
             </a:r>
             <a:endParaRPr lang="en-US" dirty="0"/>
@@ -753,6 +756,7 @@
             <a:r>
               <a:rPr lang="en-US" dirty="0"/>
               <a:t>The complete scheme of a common bus. Each source register reaches the bus through a three-state buffer with its own enable. The rule is strict: at most one enable is active at a time, so that one source drives the bus and all the others are disconnected. On the other side every destination register is connected to the bus, and only the one whose load signal is active takes the datum. Choosing the source and the destination is the job of decoders driven by the control unit.
+UNDERSTAND NOW: buses and three-state gates.
 For the lecturer: Collegamento di bus: OR di bus; trasferimento verso registri-destinazione. Inside modern chips long shared lines are usually replaced by multiplexers, which do the same selection without high-impedance states; between chips, three-state buses are still the rule.</a:t>
             </a:r>
             <a:endParaRPr lang="en-US" dirty="0"/>
@@ -842,6 +846,7 @@
             <a:r>
               <a:rPr lang="en-US" dirty="0"/>
               <a:t>A shift register is a chain of one-bit cells in which, at every clock pulse, each bit moves to the adjacent cell. Each cell is a D flip-flop whose input is the output of its neighbour. The edge-triggered behaviour of the flip-flop is essential: with transparent latches a bit would run through the whole chain during a single clock pulse. The shift can be in a fixed direction or in a direction chosen by a control line.
+UNDERSTAND NOW: shift registers.
 For the lecturer: Registri a scorrimento. Edge-triggered flip-flops are essential here: with transparent latches a bit would run through the whole chain in one clock pulse (Lecture 13).</a:t>
             </a:r>
             <a:endParaRPr lang="en-US" dirty="0"/>
@@ -931,6 +936,7 @@
             <a:r>
               <a:rPr lang="en-US" dirty="0"/>
               <a:t>The same chain of flip-flops gives four machines, according to where the data enter and leave. Serial in, serial out: a delay line. Serial in, parallel out: it collects bits arriving one at a time and presents the whole word. Parallel in, serial out: it takes a word and sends it out bit by bit. Parallel in, parallel out, with no shifting, is the ordinary register. The second and the third are the two ends of every serial connection.
+UNDERSTAND NOW: shift registers.
 For the lecturer: SISO, SIPO, PISO and PIPO. The clock line is not drawn.</a:t>
             </a:r>
             <a:endParaRPr lang="en-US" dirty="0"/>
@@ -1020,6 +1026,7 @@
             <a:r>
               <a:rPr lang="en-US" dirty="0"/>
               <a:t>Two ways of moving a word between registers. In a serial transfer the serial output of one shift register feeds the serial input of another: n clock pulses, one wire. In a parallel transfer the outputs of one register feed the inputs of another: one clock pulse, n wires. The phrase on the right is the trade-off of the whole lecture: moving a word of n bits costs either time or copper.
+UNDERSTAND NOW: shift registers.
 For the lecturer: Trasferimento seriale (serial input, serial output) and trasferimento parallelo (parallel input, parallel output).</a:t>
             </a:r>
             <a:endParaRPr lang="en-US" dirty="0"/>
@@ -1109,6 +1116,7 @@
             <a:r>
               <a:rPr lang="en-US" dirty="0"/>
               <a:t>A complete serial connection in five steps: the datum is loaded in parallel into a shift register; it is shifted out, one bit per step; the bits travel on a single line; at the other end a second shift register collects them, one per step; and the rebuilt word is passed on in parallel. This is the hardware of the warm-up, and it is how the display of the kit receives every pixel. Every serial standard, from the old serial port to USB, rests on a pair of shift registers.
+UNDERSTAND NOW: shift registers.
 For the lecturer: Trasformazione serie-parallelo di un dato. UART, SPI, I2C, I2S and USB all rest on a pair of shift registers, one at each end.</a:t>
             </a:r>
             <a:endParaRPr lang="en-US" dirty="0"/>
@@ -1198,6 +1206,7 @@
             <a:r>
               <a:rPr lang="en-US" dirty="0"/>
               <a:t>Four registers of three bits and a decoder make a small memory. Two address lines choose, through the decoder, one of the four registers; three lines carry the data in and three carry them out. Three control lines complete it: chip select, so that the memory responds only when selected; a line that says read or write; and output enable, which controls three-state outputs so that several memories can share one bus. Nothing here is new: decoder, registers, three-state buffers. The next lecture scales it up.
+UNDERSTAND NOW: registers as flip-flops. UNDERSTAND LATER: memories and addresses (studied in Lecture 15).
 For the lecturer: Memoria 4 (registri) x 3 (bit): eight inputs (I0-I2, A0-A1, CS, RD, OE) and three outputs. The next lecture scales this up to the main memory.</a:t>
             </a:r>
             <a:endParaRPr lang="en-US" dirty="0"/>
@@ -1643,6 +1652,7 @@
             <a:r>
               <a:rPr lang="en-US" dirty="0"/>
               <a:t>Five conclusions. A register is a form of memory with an elementary way of working. Registers are read and written through buses. A common bus needs three-state circuits: 0, 1 and disconnected. Data travel serially or in parallel, and shift registers convert between the two. And a decoder in front of a group of registers makes a memory, which is the subject of the next lecture.
+Learning status, recap. UNDERSTAND NOW: shift registers; registers as flip-flops; buses and three-state gates. USE NOW: the complete program, the PRG32 tools (used, not studied, in this course). UNDERSTAND LATER: memory-mapped I/O (Lecture 15); memories and addresses (Lecture 15). A slide without a badge is context: a story, an example, a question, an exercise.
 For the lecturer: Next lecture: memory.</a:t>
             </a:r>
             <a:endParaRPr lang="en-US" dirty="0"/>
@@ -1732,6 +1742,7 @@
             <a:r>
               <a:rPr lang="en-US" dirty="0"/>
               <a:t>A word is a vector of n bits. A word gate is n identical gates that share one control input: with the control at 1 the word passes unchanged, with the control at 0 every bit is forced to 0. It is the natural extension of a gate from one bit to a word. The bitwise instructions of RISC-V are word gates thirty-two bits wide, and the multiplexer on words of Lecture 11 is built from them.
+UNDERSTAND NOW: registers as flip-flops.
 For the lecturer: Porte di parola. The multiplexer on words of Lecture 11 is built from word gates.</a:t>
             </a:r>
             <a:endParaRPr lang="en-US" dirty="0"/>
@@ -1821,6 +1832,7 @@
             <a:r>
               <a:rPr lang="en-US" dirty="0"/>
               <a:t>A register stores a group of bits: in its simplest form it is a group of flip-flops with a common clock. The classic example in one chip is the 74273, with eight D flip-flops, one clock and one clear. Loading a register means storing the datum present on its inputs, and it happens when the load signal is active, normally in step with the clock. Each of the registers x1 to x31 of RISC-V is thirty-two such flip-flops.
+UNDERSTAND NOW: registers as flip-flops.
 For the lecturer: Datasheet: ti.com/lit/ds/symlink/sn74ls273.pdf. The 7474 holds two D flip-flops with preset and clear. See Lecture 13 for the flip-flop itself.
 Pictures: Animation Technologies LifeView LR25 - Hitachi LS273-2523.jpg, Raimond Spekking, CC BY-SA 4.0, Wikimedia Commons.</a:t>
             </a:r>
@@ -1911,6 +1923,7 @@
             <a:r>
               <a:rPr lang="en-US" dirty="0"/>
               <a:t>A bus is the set of lines that carries a datum between the components of a system. The word comes from the Latin omnibus, "for all". A bus of n lines carries a word of n bits in one step. The transfer from a register X to a register Y is the elementary action from which everything else is built: almost every instruction you have written is, underneath, a short sequence of register transfers.
+UNDERSTAND NOW: buses and three-state gates.
 For the lecturer: Almost every instruction of Lecture 02 is, at bottom, a sequence of register transfers.</a:t>
             </a:r>
             <a:endParaRPr lang="en-US" dirty="0"/>
@@ -2000,6 +2013,7 @@
             <a:r>
               <a:rPr lang="en-US" dirty="0"/>
               <a:t>Two ways of connecting registers. With dedicated buses each possible transfer has its own lines: several transfers can happen at once, but the wires grow with the square of the number of registers. With a common bus one path serves all the transfers: each time one source and one destination are chosen, and a transfer takes two steps, from the source to the bus and from the bus to the destination. It is cheap and widespread, at the price of doing one transfer at a time.
+UNDERSTAND NOW: buses and three-state gates.
 For the lecturer: Intermediate solutions exist: several buses, each shared by a group of registers. Real processors use them.</a:t>
             </a:r>
             <a:endParaRPr lang="en-US" dirty="0"/>
@@ -2089,6 +2103,7 @@
             <a:r>
               <a:rPr lang="en-US" dirty="0"/>
               <a:t>A transfer can be parallel, with the n bits travelling together on n lines in one step, or serial, with the bits travelling one after another on a single line in n steps, or a mixture, for example one byte at a time. Remember the last line: inside a chip buses are parallel; between chips and between machines they are today almost always serial, because at very high speed it is easier to keep one line clean than thirty-two lines in step.
+UNDERSTAND NOW: buses and three-state gates.
 For the lecturer: USB, SATA, PCI Express, HDMI and Ethernet are all serial: at very high speeds it is easier to keep one fast line clean than to keep thirty-two lines in step.
 Pictures: Hand Etched PCB.png, Tpdwkouaa, CC BY-SA 4.0, Wikimedia Commons.</a:t>
             </a:r>
@@ -2179,6 +2194,7 @@
             <a:r>
               <a:rPr lang="en-US" dirty="0"/>
               <a:t>The two halves of a transfer on a common bus. On the left, from the bus to a register: the datum on the bus is loaded into R when the load signal is active. On the right, from a register to the bus: the outputs of R reach the bus through a buffer, and only while the enable signal is active. The question at the bottom leads to the next section: when the enable is not active, what must the output of the buffer be, so as not to disturb the bus?
+UNDERSTAND NOW: buses and three-state gates.
 For the lecturer: Trasferimento dati su bus unico: caricamento di un registro (da bus a registro) and trasferimento da registro a bus.</a:t>
             </a:r>
             <a:endParaRPr lang="en-US" dirty="0"/>
@@ -2268,6 +2284,7 @@
             <a:r>
               <a:rPr lang="en-US" dirty="0"/>
               <a:t>A three-state output has a third condition besides 0 and 1: high impedance, written z, in which the output is electrically disconnected from the wire. An enable input decides: when it is 1 the gate works normally, when it is 0 the output is z. The table shows it for an AND with enable: four rows of an ordinary AND, and a last row in which the output floats whatever the inputs. Electrically, both transistors of the output stage are switched off.
+UNDERSTAND NOW: buses and three-state gates.
 For the lecturer: AND tristate; segnale di abilitazione in logica 1-attiva. Electrically, both output transistors are switched off.</a:t>
             </a:r>
             <a:endParaRPr lang="en-US" dirty="0"/>
@@ -3405,6 +3422,420 @@
       </p:pic>
       <p:sp>
         <p:nvSpPr>
+          <p:cNvPr id="15" name="Shape 12"/>
+          <p:cNvSpPr/>
+          <p:nvPr/>
+        </p:nvSpPr>
+        <p:spPr>
+          <a:xfrm>
+            <a:off x="9690303" y="91440"/>
+            <a:ext cx="1952752" cy="274320"/>
+          </a:xfrm>
+          <a:prstGeom prst="rect">
+            <a:avLst/>
+          </a:prstGeom>
+          <a:solidFill>
+            <a:srgbClr val="F3E8FF"/>
+          </a:solidFill>
+          <a:ln w="12700">
+            <a:solidFill>
+              <a:srgbClr val="7E22CE"/>
+            </a:solidFill>
+            <a:prstDash val="dash"/>
+          </a:ln>
+        </p:spPr>
+      </p:sp>
+      <p:sp>
+        <p:nvSpPr>
+          <p:cNvPr id="16" name="Shape 13"/>
+          <p:cNvSpPr/>
+          <p:nvPr/>
+        </p:nvSpPr>
+        <p:spPr>
+          <a:xfrm>
+            <a:off x="9717735" y="128016"/>
+            <a:ext cx="45720" cy="45720"/>
+          </a:xfrm>
+          <a:prstGeom prst="rect">
+            <a:avLst/>
+          </a:prstGeom>
+          <a:solidFill>
+            <a:srgbClr val="7E22CE"/>
+          </a:solidFill>
+          <a:ln w="12700">
+            <a:solidFill>
+              <a:srgbClr val="7E22CE"/>
+            </a:solidFill>
+            <a:prstDash val="solid"/>
+          </a:ln>
+        </p:spPr>
+      </p:sp>
+      <p:sp>
+        <p:nvSpPr>
+          <p:cNvPr id="17" name="Shape 14"/>
+          <p:cNvSpPr/>
+          <p:nvPr/>
+        </p:nvSpPr>
+        <p:spPr>
+          <a:xfrm>
+            <a:off x="9717735" y="205740"/>
+            <a:ext cx="45720" cy="45720"/>
+          </a:xfrm>
+          <a:prstGeom prst="rect">
+            <a:avLst/>
+          </a:prstGeom>
+          <a:solidFill>
+            <a:srgbClr val="7E22CE"/>
+          </a:solidFill>
+          <a:ln w="12700">
+            <a:solidFill>
+              <a:srgbClr val="7E22CE"/>
+            </a:solidFill>
+            <a:prstDash val="solid"/>
+          </a:ln>
+        </p:spPr>
+      </p:sp>
+      <p:sp>
+        <p:nvSpPr>
+          <p:cNvPr id="18" name="Shape 15"/>
+          <p:cNvSpPr/>
+          <p:nvPr/>
+        </p:nvSpPr>
+        <p:spPr>
+          <a:xfrm>
+            <a:off x="9717735" y="283464"/>
+            <a:ext cx="45720" cy="45720"/>
+          </a:xfrm>
+          <a:prstGeom prst="rect">
+            <a:avLst/>
+          </a:prstGeom>
+          <a:solidFill>
+            <a:srgbClr val="7E22CE"/>
+          </a:solidFill>
+          <a:ln w="12700">
+            <a:solidFill>
+              <a:srgbClr val="7E22CE"/>
+            </a:solidFill>
+            <a:prstDash val="solid"/>
+          </a:ln>
+        </p:spPr>
+      </p:sp>
+      <p:pic>
+        <p:nvPicPr>
+          <p:cNvPr id="19" name="Image 1" descr="preencoded.png">    </p:cNvPr>
+          <p:cNvPicPr>
+            <a:picLocks noChangeAspect="1"/>
+          </p:cNvPicPr>
+          <p:nvPr/>
+        </p:nvPicPr>
+        <p:blipFill>
+          <a:blip r:embed="rId2"/>
+          <a:stretch>
+            <a:fillRect/>
+          </a:stretch>
+        </p:blipFill>
+        <p:spPr>
+          <a:xfrm>
+            <a:off x="9818319" y="128016"/>
+            <a:ext cx="201168" cy="201168"/>
+          </a:xfrm>
+          <a:prstGeom prst="rect">
+            <a:avLst/>
+          </a:prstGeom>
+        </p:spPr>
+      </p:pic>
+      <p:sp>
+        <p:nvSpPr>
+          <p:cNvPr id="20" name="Text 16"/>
+          <p:cNvSpPr txBox="1"/>
+          <p:nvPr/>
+        </p:nvSpPr>
+        <p:spPr>
+          <a:xfrm>
+            <a:off x="10074351" y="91440"/>
+            <a:ext cx="1532128" cy="274320"/>
+          </a:xfrm>
+          <a:prstGeom prst="rect">
+            <a:avLst/>
+          </a:prstGeom>
+          <a:noFill/>
+          <a:ln/>
+        </p:spPr>
+        <p:txBody>
+          <a:bodyPr wrap="square" lIns="0" tIns="0" rIns="0" bIns="0" rtlCol="0" anchor="ctr"/>
+          <a:lstStyle/>
+          <a:p>
+            <a:pPr indent="0" marL="0">
+              <a:buNone/>
+            </a:pPr>
+            <a:r>
+              <a:rPr lang="en-US" sz="1100" b="1" dirty="0">
+                <a:solidFill>
+                  <a:srgbClr val="6B21A8"/>
+                </a:solidFill>
+                <a:latin typeface="Calibri" pitchFamily="34" charset="0"/>
+                <a:ea typeface="Calibri" pitchFamily="34" charset="-122"/>
+                <a:cs typeface="Calibri" pitchFamily="34" charset="-120"/>
+              </a:rPr>
+              <a:t>UNDERSTAND LATER</a:t>
+            </a:r>
+            <a:endParaRPr lang="en-US" sz="1100" dirty="0"/>
+          </a:p>
+        </p:txBody>
+      </p:sp>
+      <p:sp>
+        <p:nvSpPr>
+          <p:cNvPr id="21" name="Shape 17"/>
+          <p:cNvSpPr/>
+          <p:nvPr/>
+        </p:nvSpPr>
+        <p:spPr>
+          <a:xfrm>
+            <a:off x="8407349" y="91440"/>
+            <a:ext cx="1173226" cy="274320"/>
+          </a:xfrm>
+          <a:prstGeom prst="rect">
+            <a:avLst/>
+          </a:prstGeom>
+          <a:solidFill>
+            <a:srgbClr val="FEF3C7"/>
+          </a:solidFill>
+          <a:ln w="12700">
+            <a:solidFill>
+              <a:srgbClr val="B45309"/>
+            </a:solidFill>
+            <a:prstDash val="solid"/>
+          </a:ln>
+        </p:spPr>
+      </p:sp>
+      <p:sp>
+        <p:nvSpPr>
+          <p:cNvPr id="22" name="Shape 18"/>
+          <p:cNvSpPr/>
+          <p:nvPr/>
+        </p:nvSpPr>
+        <p:spPr>
+          <a:xfrm>
+            <a:off x="8407349" y="91440"/>
+            <a:ext cx="27432" cy="274320"/>
+          </a:xfrm>
+          <a:prstGeom prst="rect">
+            <a:avLst/>
+          </a:prstGeom>
+          <a:solidFill>
+            <a:srgbClr val="B45309"/>
+          </a:solidFill>
+          <a:ln w="12700">
+            <a:solidFill>
+              <a:srgbClr val="B45309"/>
+            </a:solidFill>
+            <a:prstDash val="solid"/>
+          </a:ln>
+        </p:spPr>
+      </p:sp>
+      <p:sp>
+        <p:nvSpPr>
+          <p:cNvPr id="23" name="Shape 19"/>
+          <p:cNvSpPr/>
+          <p:nvPr/>
+        </p:nvSpPr>
+        <p:spPr>
+          <a:xfrm>
+            <a:off x="8462213" y="91440"/>
+            <a:ext cx="27432" cy="274320"/>
+          </a:xfrm>
+          <a:prstGeom prst="rect">
+            <a:avLst/>
+          </a:prstGeom>
+          <a:solidFill>
+            <a:srgbClr val="B45309"/>
+          </a:solidFill>
+          <a:ln w="12700">
+            <a:solidFill>
+              <a:srgbClr val="B45309"/>
+            </a:solidFill>
+            <a:prstDash val="solid"/>
+          </a:ln>
+        </p:spPr>
+      </p:sp>
+      <p:pic>
+        <p:nvPicPr>
+          <p:cNvPr id="24" name="Image 2" descr="preencoded.png">    </p:cNvPr>
+          <p:cNvPicPr>
+            <a:picLocks noChangeAspect="1"/>
+          </p:cNvPicPr>
+          <p:nvPr/>
+        </p:nvPicPr>
+        <p:blipFill>
+          <a:blip r:embed="rId3"/>
+          <a:stretch>
+            <a:fillRect/>
+          </a:stretch>
+        </p:blipFill>
+        <p:spPr>
+          <a:xfrm>
+            <a:off x="8535365" y="128016"/>
+            <a:ext cx="201168" cy="201168"/>
+          </a:xfrm>
+          <a:prstGeom prst="rect">
+            <a:avLst/>
+          </a:prstGeom>
+        </p:spPr>
+      </p:pic>
+      <p:sp>
+        <p:nvSpPr>
+          <p:cNvPr id="25" name="Text 20"/>
+          <p:cNvSpPr txBox="1"/>
+          <p:nvPr/>
+        </p:nvSpPr>
+        <p:spPr>
+          <a:xfrm>
+            <a:off x="8791397" y="91440"/>
+            <a:ext cx="752602" cy="274320"/>
+          </a:xfrm>
+          <a:prstGeom prst="rect">
+            <a:avLst/>
+          </a:prstGeom>
+          <a:noFill/>
+          <a:ln/>
+        </p:spPr>
+        <p:txBody>
+          <a:bodyPr wrap="square" lIns="0" tIns="0" rIns="0" bIns="0" rtlCol="0" anchor="ctr"/>
+          <a:lstStyle/>
+          <a:p>
+            <a:pPr indent="0" marL="0">
+              <a:buNone/>
+            </a:pPr>
+            <a:r>
+              <a:rPr lang="en-US" sz="1100" b="1" dirty="0">
+                <a:solidFill>
+                  <a:srgbClr val="92400E"/>
+                </a:solidFill>
+                <a:latin typeface="Calibri" pitchFamily="34" charset="0"/>
+                <a:ea typeface="Calibri" pitchFamily="34" charset="-122"/>
+                <a:cs typeface="Calibri" pitchFamily="34" charset="-120"/>
+              </a:rPr>
+              <a:t>USE NOW</a:t>
+            </a:r>
+            <a:endParaRPr lang="en-US" sz="1100" dirty="0"/>
+          </a:p>
+        </p:txBody>
+      </p:sp>
+      <p:sp>
+        <p:nvSpPr>
+          <p:cNvPr id="26" name="Shape 21"/>
+          <p:cNvSpPr/>
+          <p:nvPr/>
+        </p:nvSpPr>
+        <p:spPr>
+          <a:xfrm>
+            <a:off x="6518097" y="91440"/>
+            <a:ext cx="1779524" cy="274320"/>
+          </a:xfrm>
+          <a:prstGeom prst="rect">
+            <a:avLst/>
+          </a:prstGeom>
+          <a:solidFill>
+            <a:srgbClr val="E0F2FE"/>
+          </a:solidFill>
+          <a:ln w="12700">
+            <a:solidFill>
+              <a:srgbClr val="0369A1"/>
+            </a:solidFill>
+            <a:prstDash val="solid"/>
+          </a:ln>
+        </p:spPr>
+      </p:sp>
+      <p:sp>
+        <p:nvSpPr>
+          <p:cNvPr id="27" name="Shape 22"/>
+          <p:cNvSpPr/>
+          <p:nvPr/>
+        </p:nvSpPr>
+        <p:spPr>
+          <a:xfrm>
+            <a:off x="6518097" y="91440"/>
+            <a:ext cx="73152" cy="274320"/>
+          </a:xfrm>
+          <a:prstGeom prst="rect">
+            <a:avLst/>
+          </a:prstGeom>
+          <a:solidFill>
+            <a:srgbClr val="0369A1"/>
+          </a:solidFill>
+          <a:ln w="12700">
+            <a:solidFill>
+              <a:srgbClr val="0369A1"/>
+            </a:solidFill>
+            <a:prstDash val="solid"/>
+          </a:ln>
+        </p:spPr>
+      </p:sp>
+      <p:pic>
+        <p:nvPicPr>
+          <p:cNvPr id="28" name="Image 3" descr="preencoded.png">    </p:cNvPr>
+          <p:cNvPicPr>
+            <a:picLocks noChangeAspect="1"/>
+          </p:cNvPicPr>
+          <p:nvPr/>
+        </p:nvPicPr>
+        <p:blipFill>
+          <a:blip r:embed="rId4"/>
+          <a:stretch>
+            <a:fillRect/>
+          </a:stretch>
+        </p:blipFill>
+        <p:spPr>
+          <a:xfrm>
+            <a:off x="6646113" y="128016"/>
+            <a:ext cx="201168" cy="201168"/>
+          </a:xfrm>
+          <a:prstGeom prst="rect">
+            <a:avLst/>
+          </a:prstGeom>
+        </p:spPr>
+      </p:pic>
+      <p:sp>
+        <p:nvSpPr>
+          <p:cNvPr id="29" name="Text 23"/>
+          <p:cNvSpPr txBox="1"/>
+          <p:nvPr/>
+        </p:nvSpPr>
+        <p:spPr>
+          <a:xfrm>
+            <a:off x="6902145" y="91440"/>
+            <a:ext cx="1358900" cy="274320"/>
+          </a:xfrm>
+          <a:prstGeom prst="rect">
+            <a:avLst/>
+          </a:prstGeom>
+          <a:noFill/>
+          <a:ln/>
+        </p:spPr>
+        <p:txBody>
+          <a:bodyPr wrap="square" lIns="0" tIns="0" rIns="0" bIns="0" rtlCol="0" anchor="ctr"/>
+          <a:lstStyle/>
+          <a:p>
+            <a:pPr indent="0" marL="0">
+              <a:buNone/>
+            </a:pPr>
+            <a:r>
+              <a:rPr lang="en-US" sz="1100" b="1" dirty="0">
+                <a:solidFill>
+                  <a:srgbClr val="075985"/>
+                </a:solidFill>
+                <a:latin typeface="Calibri" pitchFamily="34" charset="0"/>
+                <a:ea typeface="Calibri" pitchFamily="34" charset="-122"/>
+                <a:cs typeface="Calibri" pitchFamily="34" charset="-120"/>
+              </a:rPr>
+              <a:t>UNDERSTAND NOW</a:t>
+            </a:r>
+            <a:endParaRPr lang="en-US" sz="1100" dirty="0"/>
+          </a:p>
+        </p:txBody>
+      </p:sp>
+      <p:sp>
+        <p:nvSpPr>
           <p:cNvPr id="25" name="Slide Number Placeholder 0"/>
           <p:cNvSpPr>
             <a:spLocks noGrp="1"/>
@@ -3892,6 +4323,133 @@
       </p:sp>
       <p:sp>
         <p:nvSpPr>
+          <p:cNvPr id="14" name="Shape 12"/>
+          <p:cNvSpPr/>
+          <p:nvPr/>
+        </p:nvSpPr>
+        <p:spPr>
+          <a:xfrm>
+            <a:off x="7893761" y="91440"/>
+            <a:ext cx="3749294" cy="274320"/>
+          </a:xfrm>
+          <a:prstGeom prst="rect">
+            <a:avLst/>
+          </a:prstGeom>
+          <a:solidFill>
+            <a:srgbClr val="E0F2FE"/>
+          </a:solidFill>
+          <a:ln w="12700">
+            <a:solidFill>
+              <a:srgbClr val="0369A1"/>
+            </a:solidFill>
+            <a:prstDash val="solid"/>
+          </a:ln>
+        </p:spPr>
+      </p:sp>
+      <p:sp>
+        <p:nvSpPr>
+          <p:cNvPr id="15" name="Shape 13"/>
+          <p:cNvSpPr/>
+          <p:nvPr/>
+        </p:nvSpPr>
+        <p:spPr>
+          <a:xfrm>
+            <a:off x="7893761" y="91440"/>
+            <a:ext cx="73152" cy="274320"/>
+          </a:xfrm>
+          <a:prstGeom prst="rect">
+            <a:avLst/>
+          </a:prstGeom>
+          <a:solidFill>
+            <a:srgbClr val="0369A1"/>
+          </a:solidFill>
+          <a:ln w="12700">
+            <a:solidFill>
+              <a:srgbClr val="0369A1"/>
+            </a:solidFill>
+            <a:prstDash val="solid"/>
+          </a:ln>
+        </p:spPr>
+      </p:sp>
+      <p:pic>
+        <p:nvPicPr>
+          <p:cNvPr id="16" name="Image 0" descr="preencoded.png">    </p:cNvPr>
+          <p:cNvPicPr>
+            <a:picLocks noChangeAspect="1"/>
+          </p:cNvPicPr>
+          <p:nvPr/>
+        </p:nvPicPr>
+        <p:blipFill>
+          <a:blip r:embed="rId1"/>
+          <a:stretch>
+            <a:fillRect/>
+          </a:stretch>
+        </p:blipFill>
+        <p:spPr>
+          <a:xfrm>
+            <a:off x="8021777" y="128016"/>
+            <a:ext cx="201168" cy="201168"/>
+          </a:xfrm>
+          <a:prstGeom prst="rect">
+            <a:avLst/>
+          </a:prstGeom>
+        </p:spPr>
+      </p:pic>
+      <p:sp>
+        <p:nvSpPr>
+          <p:cNvPr id="17" name="Text 14"/>
+          <p:cNvSpPr txBox="1"/>
+          <p:nvPr/>
+        </p:nvSpPr>
+        <p:spPr>
+          <a:xfrm>
+            <a:off x="8277809" y="91440"/>
+            <a:ext cx="3328670" cy="274320"/>
+          </a:xfrm>
+          <a:prstGeom prst="rect">
+            <a:avLst/>
+          </a:prstGeom>
+          <a:noFill/>
+          <a:ln/>
+        </p:spPr>
+        <p:txBody>
+          <a:bodyPr wrap="square" lIns="0" tIns="0" rIns="0" bIns="0" rtlCol="0" anchor="ctr"/>
+          <a:lstStyle/>
+          <a:p>
+            <a:pPr indent="0" marL="0">
+              <a:buNone/>
+            </a:pPr>
+            <a:r>
+              <a:rPr lang="en-US" sz="1100" b="1" dirty="0">
+                <a:solidFill>
+                  <a:srgbClr val="075985"/>
+                </a:solidFill>
+                <a:latin typeface="Calibri" pitchFamily="34" charset="0"/>
+                <a:ea typeface="Calibri" pitchFamily="34" charset="-122"/>
+                <a:cs typeface="Calibri" pitchFamily="34" charset="-120"/>
+              </a:rPr>
+              <a:t>UNDERSTAND NOW</a:t>
+            </a:r>
+            <a:pPr indent="0" marL="0">
+              <a:buNone/>
+            </a:pPr>
+            <a:r>
+              <a:rPr lang="en-US" sz="1100" dirty="0">
+                <a:solidFill>
+                  <a:srgbClr val="075985"/>
+                </a:solidFill>
+                <a:latin typeface="Calibri" pitchFamily="34" charset="0"/>
+                <a:ea typeface="Calibri" pitchFamily="34" charset="-122"/>
+                <a:cs typeface="Calibri" pitchFamily="34" charset="-120"/>
+              </a:rPr>
+              <a:t> · buses and three-state gates</a:t>
+            </a:r>
+            <a:endParaRPr lang="en-US" sz="1100" dirty="0"/>
+          </a:p>
+        </p:txBody>
+      </p:sp>
+      <p:sp>
+        <p:nvSpPr>
           <p:cNvPr id="25" name="Slide Number Placeholder 0"/>
           <p:cNvSpPr>
             <a:spLocks noGrp="1"/>
@@ -4967,6 +5525,133 @@
       </p:sp>
       <p:sp>
         <p:nvSpPr>
+          <p:cNvPr id="30" name="Shape 28"/>
+          <p:cNvSpPr/>
+          <p:nvPr/>
+        </p:nvSpPr>
+        <p:spPr>
+          <a:xfrm>
+            <a:off x="7893761" y="91440"/>
+            <a:ext cx="3749294" cy="274320"/>
+          </a:xfrm>
+          <a:prstGeom prst="rect">
+            <a:avLst/>
+          </a:prstGeom>
+          <a:solidFill>
+            <a:srgbClr val="E0F2FE"/>
+          </a:solidFill>
+          <a:ln w="12700">
+            <a:solidFill>
+              <a:srgbClr val="0369A1"/>
+            </a:solidFill>
+            <a:prstDash val="solid"/>
+          </a:ln>
+        </p:spPr>
+      </p:sp>
+      <p:sp>
+        <p:nvSpPr>
+          <p:cNvPr id="31" name="Shape 29"/>
+          <p:cNvSpPr/>
+          <p:nvPr/>
+        </p:nvSpPr>
+        <p:spPr>
+          <a:xfrm>
+            <a:off x="7893761" y="91440"/>
+            <a:ext cx="73152" cy="274320"/>
+          </a:xfrm>
+          <a:prstGeom prst="rect">
+            <a:avLst/>
+          </a:prstGeom>
+          <a:solidFill>
+            <a:srgbClr val="0369A1"/>
+          </a:solidFill>
+          <a:ln w="12700">
+            <a:solidFill>
+              <a:srgbClr val="0369A1"/>
+            </a:solidFill>
+            <a:prstDash val="solid"/>
+          </a:ln>
+        </p:spPr>
+      </p:sp>
+      <p:pic>
+        <p:nvPicPr>
+          <p:cNvPr id="32" name="Image 0" descr="preencoded.png">    </p:cNvPr>
+          <p:cNvPicPr>
+            <a:picLocks noChangeAspect="1"/>
+          </p:cNvPicPr>
+          <p:nvPr/>
+        </p:nvPicPr>
+        <p:blipFill>
+          <a:blip r:embed="rId1"/>
+          <a:stretch>
+            <a:fillRect/>
+          </a:stretch>
+        </p:blipFill>
+        <p:spPr>
+          <a:xfrm>
+            <a:off x="8021777" y="128016"/>
+            <a:ext cx="201168" cy="201168"/>
+          </a:xfrm>
+          <a:prstGeom prst="rect">
+            <a:avLst/>
+          </a:prstGeom>
+        </p:spPr>
+      </p:pic>
+      <p:sp>
+        <p:nvSpPr>
+          <p:cNvPr id="33" name="Text 30"/>
+          <p:cNvSpPr txBox="1"/>
+          <p:nvPr/>
+        </p:nvSpPr>
+        <p:spPr>
+          <a:xfrm>
+            <a:off x="8277809" y="91440"/>
+            <a:ext cx="3328670" cy="274320"/>
+          </a:xfrm>
+          <a:prstGeom prst="rect">
+            <a:avLst/>
+          </a:prstGeom>
+          <a:noFill/>
+          <a:ln/>
+        </p:spPr>
+        <p:txBody>
+          <a:bodyPr wrap="square" lIns="0" tIns="0" rIns="0" bIns="0" rtlCol="0" anchor="ctr"/>
+          <a:lstStyle/>
+          <a:p>
+            <a:pPr indent="0" marL="0">
+              <a:buNone/>
+            </a:pPr>
+            <a:r>
+              <a:rPr lang="en-US" sz="1100" b="1" dirty="0">
+                <a:solidFill>
+                  <a:srgbClr val="075985"/>
+                </a:solidFill>
+                <a:latin typeface="Calibri" pitchFamily="34" charset="0"/>
+                <a:ea typeface="Calibri" pitchFamily="34" charset="-122"/>
+                <a:cs typeface="Calibri" pitchFamily="34" charset="-120"/>
+              </a:rPr>
+              <a:t>UNDERSTAND NOW</a:t>
+            </a:r>
+            <a:pPr indent="0" marL="0">
+              <a:buNone/>
+            </a:pPr>
+            <a:r>
+              <a:rPr lang="en-US" sz="1100" dirty="0">
+                <a:solidFill>
+                  <a:srgbClr val="075985"/>
+                </a:solidFill>
+                <a:latin typeface="Calibri" pitchFamily="34" charset="0"/>
+                <a:ea typeface="Calibri" pitchFamily="34" charset="-122"/>
+                <a:cs typeface="Calibri" pitchFamily="34" charset="-120"/>
+              </a:rPr>
+              <a:t> · buses and three-state gates</a:t>
+            </a:r>
+            <a:endParaRPr lang="en-US" sz="1100" dirty="0"/>
+          </a:p>
+        </p:txBody>
+      </p:sp>
+      <p:sp>
+        <p:nvSpPr>
           <p:cNvPr id="25" name="Slide Number Placeholder 0"/>
           <p:cNvSpPr>
             <a:spLocks noGrp="1"/>
@@ -5387,6 +6072,133 @@
       </p:sp>
       <p:sp>
         <p:nvSpPr>
+          <p:cNvPr id="12" name="Shape 10"/>
+          <p:cNvSpPr/>
+          <p:nvPr/>
+        </p:nvSpPr>
+        <p:spPr>
+          <a:xfrm>
+            <a:off x="8681669" y="91440"/>
+            <a:ext cx="2961386" cy="274320"/>
+          </a:xfrm>
+          <a:prstGeom prst="rect">
+            <a:avLst/>
+          </a:prstGeom>
+          <a:solidFill>
+            <a:srgbClr val="E0F2FE"/>
+          </a:solidFill>
+          <a:ln w="12700">
+            <a:solidFill>
+              <a:srgbClr val="0369A1"/>
+            </a:solidFill>
+            <a:prstDash val="solid"/>
+          </a:ln>
+        </p:spPr>
+      </p:sp>
+      <p:sp>
+        <p:nvSpPr>
+          <p:cNvPr id="13" name="Shape 11"/>
+          <p:cNvSpPr/>
+          <p:nvPr/>
+        </p:nvSpPr>
+        <p:spPr>
+          <a:xfrm>
+            <a:off x="8681669" y="91440"/>
+            <a:ext cx="73152" cy="274320"/>
+          </a:xfrm>
+          <a:prstGeom prst="rect">
+            <a:avLst/>
+          </a:prstGeom>
+          <a:solidFill>
+            <a:srgbClr val="0369A1"/>
+          </a:solidFill>
+          <a:ln w="12700">
+            <a:solidFill>
+              <a:srgbClr val="0369A1"/>
+            </a:solidFill>
+            <a:prstDash val="solid"/>
+          </a:ln>
+        </p:spPr>
+      </p:sp>
+      <p:pic>
+        <p:nvPicPr>
+          <p:cNvPr id="14" name="Image 0" descr="preencoded.png">    </p:cNvPr>
+          <p:cNvPicPr>
+            <a:picLocks noChangeAspect="1"/>
+          </p:cNvPicPr>
+          <p:nvPr/>
+        </p:nvPicPr>
+        <p:blipFill>
+          <a:blip r:embed="rId1"/>
+          <a:stretch>
+            <a:fillRect/>
+          </a:stretch>
+        </p:blipFill>
+        <p:spPr>
+          <a:xfrm>
+            <a:off x="8809685" y="128016"/>
+            <a:ext cx="201168" cy="201168"/>
+          </a:xfrm>
+          <a:prstGeom prst="rect">
+            <a:avLst/>
+          </a:prstGeom>
+        </p:spPr>
+      </p:pic>
+      <p:sp>
+        <p:nvSpPr>
+          <p:cNvPr id="15" name="Text 12"/>
+          <p:cNvSpPr txBox="1"/>
+          <p:nvPr/>
+        </p:nvSpPr>
+        <p:spPr>
+          <a:xfrm>
+            <a:off x="9065717" y="91440"/>
+            <a:ext cx="2540762" cy="274320"/>
+          </a:xfrm>
+          <a:prstGeom prst="rect">
+            <a:avLst/>
+          </a:prstGeom>
+          <a:noFill/>
+          <a:ln/>
+        </p:spPr>
+        <p:txBody>
+          <a:bodyPr wrap="square" lIns="0" tIns="0" rIns="0" bIns="0" rtlCol="0" anchor="ctr"/>
+          <a:lstStyle/>
+          <a:p>
+            <a:pPr indent="0" marL="0">
+              <a:buNone/>
+            </a:pPr>
+            <a:r>
+              <a:rPr lang="en-US" sz="1100" b="1" dirty="0">
+                <a:solidFill>
+                  <a:srgbClr val="075985"/>
+                </a:solidFill>
+                <a:latin typeface="Calibri" pitchFamily="34" charset="0"/>
+                <a:ea typeface="Calibri" pitchFamily="34" charset="-122"/>
+                <a:cs typeface="Calibri" pitchFamily="34" charset="-120"/>
+              </a:rPr>
+              <a:t>UNDERSTAND NOW</a:t>
+            </a:r>
+            <a:pPr indent="0" marL="0">
+              <a:buNone/>
+            </a:pPr>
+            <a:r>
+              <a:rPr lang="en-US" sz="1100" dirty="0">
+                <a:solidFill>
+                  <a:srgbClr val="075985"/>
+                </a:solidFill>
+                <a:latin typeface="Calibri" pitchFamily="34" charset="0"/>
+                <a:ea typeface="Calibri" pitchFamily="34" charset="-122"/>
+                <a:cs typeface="Calibri" pitchFamily="34" charset="-120"/>
+              </a:rPr>
+              <a:t> · shift registers</a:t>
+            </a:r>
+            <a:endParaRPr lang="en-US" sz="1100" dirty="0"/>
+          </a:p>
+        </p:txBody>
+      </p:sp>
+      <p:sp>
+        <p:nvSpPr>
           <p:cNvPr id="25" name="Slide Number Placeholder 0"/>
           <p:cNvSpPr>
             <a:spLocks noGrp="1"/>
@@ -7216,6 +8028,133 @@
       </p:sp>
       <p:sp>
         <p:nvSpPr>
+          <p:cNvPr id="56" name="Shape 54"/>
+          <p:cNvSpPr/>
+          <p:nvPr/>
+        </p:nvSpPr>
+        <p:spPr>
+          <a:xfrm>
+            <a:off x="8681669" y="91440"/>
+            <a:ext cx="2961386" cy="274320"/>
+          </a:xfrm>
+          <a:prstGeom prst="rect">
+            <a:avLst/>
+          </a:prstGeom>
+          <a:solidFill>
+            <a:srgbClr val="E0F2FE"/>
+          </a:solidFill>
+          <a:ln w="12700">
+            <a:solidFill>
+              <a:srgbClr val="0369A1"/>
+            </a:solidFill>
+            <a:prstDash val="solid"/>
+          </a:ln>
+        </p:spPr>
+      </p:sp>
+      <p:sp>
+        <p:nvSpPr>
+          <p:cNvPr id="57" name="Shape 55"/>
+          <p:cNvSpPr/>
+          <p:nvPr/>
+        </p:nvSpPr>
+        <p:spPr>
+          <a:xfrm>
+            <a:off x="8681669" y="91440"/>
+            <a:ext cx="73152" cy="274320"/>
+          </a:xfrm>
+          <a:prstGeom prst="rect">
+            <a:avLst/>
+          </a:prstGeom>
+          <a:solidFill>
+            <a:srgbClr val="0369A1"/>
+          </a:solidFill>
+          <a:ln w="12700">
+            <a:solidFill>
+              <a:srgbClr val="0369A1"/>
+            </a:solidFill>
+            <a:prstDash val="solid"/>
+          </a:ln>
+        </p:spPr>
+      </p:sp>
+      <p:pic>
+        <p:nvPicPr>
+          <p:cNvPr id="58" name="Image 0" descr="preencoded.png">    </p:cNvPr>
+          <p:cNvPicPr>
+            <a:picLocks noChangeAspect="1"/>
+          </p:cNvPicPr>
+          <p:nvPr/>
+        </p:nvPicPr>
+        <p:blipFill>
+          <a:blip r:embed="rId1"/>
+          <a:stretch>
+            <a:fillRect/>
+          </a:stretch>
+        </p:blipFill>
+        <p:spPr>
+          <a:xfrm>
+            <a:off x="8809685" y="128016"/>
+            <a:ext cx="201168" cy="201168"/>
+          </a:xfrm>
+          <a:prstGeom prst="rect">
+            <a:avLst/>
+          </a:prstGeom>
+        </p:spPr>
+      </p:pic>
+      <p:sp>
+        <p:nvSpPr>
+          <p:cNvPr id="59" name="Text 56"/>
+          <p:cNvSpPr txBox="1"/>
+          <p:nvPr/>
+        </p:nvSpPr>
+        <p:spPr>
+          <a:xfrm>
+            <a:off x="9065717" y="91440"/>
+            <a:ext cx="2540762" cy="274320"/>
+          </a:xfrm>
+          <a:prstGeom prst="rect">
+            <a:avLst/>
+          </a:prstGeom>
+          <a:noFill/>
+          <a:ln/>
+        </p:spPr>
+        <p:txBody>
+          <a:bodyPr wrap="square" lIns="0" tIns="0" rIns="0" bIns="0" rtlCol="0" anchor="ctr"/>
+          <a:lstStyle/>
+          <a:p>
+            <a:pPr indent="0" marL="0">
+              <a:buNone/>
+            </a:pPr>
+            <a:r>
+              <a:rPr lang="en-US" sz="1100" b="1" dirty="0">
+                <a:solidFill>
+                  <a:srgbClr val="075985"/>
+                </a:solidFill>
+                <a:latin typeface="Calibri" pitchFamily="34" charset="0"/>
+                <a:ea typeface="Calibri" pitchFamily="34" charset="-122"/>
+                <a:cs typeface="Calibri" pitchFamily="34" charset="-120"/>
+              </a:rPr>
+              <a:t>UNDERSTAND NOW</a:t>
+            </a:r>
+            <a:pPr indent="0" marL="0">
+              <a:buNone/>
+            </a:pPr>
+            <a:r>
+              <a:rPr lang="en-US" sz="1100" dirty="0">
+                <a:solidFill>
+                  <a:srgbClr val="075985"/>
+                </a:solidFill>
+                <a:latin typeface="Calibri" pitchFamily="34" charset="0"/>
+                <a:ea typeface="Calibri" pitchFamily="34" charset="-122"/>
+                <a:cs typeface="Calibri" pitchFamily="34" charset="-120"/>
+              </a:rPr>
+              <a:t> · shift registers</a:t>
+            </a:r>
+            <a:endParaRPr lang="en-US" sz="1100" dirty="0"/>
+          </a:p>
+        </p:txBody>
+      </p:sp>
+      <p:sp>
+        <p:nvSpPr>
           <p:cNvPr id="25" name="Slide Number Placeholder 0"/>
           <p:cNvSpPr>
             <a:spLocks noGrp="1"/>
@@ -7676,6 +8615,133 @@
       </p:sp>
       <p:sp>
         <p:nvSpPr>
+          <p:cNvPr id="12" name="Shape 10"/>
+          <p:cNvSpPr/>
+          <p:nvPr/>
+        </p:nvSpPr>
+        <p:spPr>
+          <a:xfrm>
+            <a:off x="8681669" y="91440"/>
+            <a:ext cx="2961386" cy="274320"/>
+          </a:xfrm>
+          <a:prstGeom prst="rect">
+            <a:avLst/>
+          </a:prstGeom>
+          <a:solidFill>
+            <a:srgbClr val="E0F2FE"/>
+          </a:solidFill>
+          <a:ln w="12700">
+            <a:solidFill>
+              <a:srgbClr val="0369A1"/>
+            </a:solidFill>
+            <a:prstDash val="solid"/>
+          </a:ln>
+        </p:spPr>
+      </p:sp>
+      <p:sp>
+        <p:nvSpPr>
+          <p:cNvPr id="13" name="Shape 11"/>
+          <p:cNvSpPr/>
+          <p:nvPr/>
+        </p:nvSpPr>
+        <p:spPr>
+          <a:xfrm>
+            <a:off x="8681669" y="91440"/>
+            <a:ext cx="73152" cy="274320"/>
+          </a:xfrm>
+          <a:prstGeom prst="rect">
+            <a:avLst/>
+          </a:prstGeom>
+          <a:solidFill>
+            <a:srgbClr val="0369A1"/>
+          </a:solidFill>
+          <a:ln w="12700">
+            <a:solidFill>
+              <a:srgbClr val="0369A1"/>
+            </a:solidFill>
+            <a:prstDash val="solid"/>
+          </a:ln>
+        </p:spPr>
+      </p:sp>
+      <p:pic>
+        <p:nvPicPr>
+          <p:cNvPr id="14" name="Image 0" descr="preencoded.png">    </p:cNvPr>
+          <p:cNvPicPr>
+            <a:picLocks noChangeAspect="1"/>
+          </p:cNvPicPr>
+          <p:nvPr/>
+        </p:nvPicPr>
+        <p:blipFill>
+          <a:blip r:embed="rId1"/>
+          <a:stretch>
+            <a:fillRect/>
+          </a:stretch>
+        </p:blipFill>
+        <p:spPr>
+          <a:xfrm>
+            <a:off x="8809685" y="128016"/>
+            <a:ext cx="201168" cy="201168"/>
+          </a:xfrm>
+          <a:prstGeom prst="rect">
+            <a:avLst/>
+          </a:prstGeom>
+        </p:spPr>
+      </p:pic>
+      <p:sp>
+        <p:nvSpPr>
+          <p:cNvPr id="15" name="Text 12"/>
+          <p:cNvSpPr txBox="1"/>
+          <p:nvPr/>
+        </p:nvSpPr>
+        <p:spPr>
+          <a:xfrm>
+            <a:off x="9065717" y="91440"/>
+            <a:ext cx="2540762" cy="274320"/>
+          </a:xfrm>
+          <a:prstGeom prst="rect">
+            <a:avLst/>
+          </a:prstGeom>
+          <a:noFill/>
+          <a:ln/>
+        </p:spPr>
+        <p:txBody>
+          <a:bodyPr wrap="square" lIns="0" tIns="0" rIns="0" bIns="0" rtlCol="0" anchor="ctr"/>
+          <a:lstStyle/>
+          <a:p>
+            <a:pPr indent="0" marL="0">
+              <a:buNone/>
+            </a:pPr>
+            <a:r>
+              <a:rPr lang="en-US" sz="1100" b="1" dirty="0">
+                <a:solidFill>
+                  <a:srgbClr val="075985"/>
+                </a:solidFill>
+                <a:latin typeface="Calibri" pitchFamily="34" charset="0"/>
+                <a:ea typeface="Calibri" pitchFamily="34" charset="-122"/>
+                <a:cs typeface="Calibri" pitchFamily="34" charset="-120"/>
+              </a:rPr>
+              <a:t>UNDERSTAND NOW</a:t>
+            </a:r>
+            <a:pPr indent="0" marL="0">
+              <a:buNone/>
+            </a:pPr>
+            <a:r>
+              <a:rPr lang="en-US" sz="1100" dirty="0">
+                <a:solidFill>
+                  <a:srgbClr val="075985"/>
+                </a:solidFill>
+                <a:latin typeface="Calibri" pitchFamily="34" charset="0"/>
+                <a:ea typeface="Calibri" pitchFamily="34" charset="-122"/>
+                <a:cs typeface="Calibri" pitchFamily="34" charset="-120"/>
+              </a:rPr>
+              <a:t> · shift registers</a:t>
+            </a:r>
+            <a:endParaRPr lang="en-US" sz="1100" dirty="0"/>
+          </a:p>
+        </p:txBody>
+      </p:sp>
+      <p:sp>
+        <p:nvSpPr>
           <p:cNvPr id="25" name="Slide Number Placeholder 0"/>
           <p:cNvSpPr>
             <a:spLocks noGrp="1"/>
@@ -8521,6 +9587,133 @@
       </p:sp>
       <p:sp>
         <p:nvSpPr>
+          <p:cNvPr id="24" name="Shape 22"/>
+          <p:cNvSpPr/>
+          <p:nvPr/>
+        </p:nvSpPr>
+        <p:spPr>
+          <a:xfrm>
+            <a:off x="8681669" y="91440"/>
+            <a:ext cx="2961386" cy="274320"/>
+          </a:xfrm>
+          <a:prstGeom prst="rect">
+            <a:avLst/>
+          </a:prstGeom>
+          <a:solidFill>
+            <a:srgbClr val="E0F2FE"/>
+          </a:solidFill>
+          <a:ln w="12700">
+            <a:solidFill>
+              <a:srgbClr val="0369A1"/>
+            </a:solidFill>
+            <a:prstDash val="solid"/>
+          </a:ln>
+        </p:spPr>
+      </p:sp>
+      <p:sp>
+        <p:nvSpPr>
+          <p:cNvPr id="25" name="Shape 23"/>
+          <p:cNvSpPr/>
+          <p:nvPr/>
+        </p:nvSpPr>
+        <p:spPr>
+          <a:xfrm>
+            <a:off x="8681669" y="91440"/>
+            <a:ext cx="73152" cy="274320"/>
+          </a:xfrm>
+          <a:prstGeom prst="rect">
+            <a:avLst/>
+          </a:prstGeom>
+          <a:solidFill>
+            <a:srgbClr val="0369A1"/>
+          </a:solidFill>
+          <a:ln w="12700">
+            <a:solidFill>
+              <a:srgbClr val="0369A1"/>
+            </a:solidFill>
+            <a:prstDash val="solid"/>
+          </a:ln>
+        </p:spPr>
+      </p:sp>
+      <p:pic>
+        <p:nvPicPr>
+          <p:cNvPr id="26" name="Image 0" descr="preencoded.png">    </p:cNvPr>
+          <p:cNvPicPr>
+            <a:picLocks noChangeAspect="1"/>
+          </p:cNvPicPr>
+          <p:nvPr/>
+        </p:nvPicPr>
+        <p:blipFill>
+          <a:blip r:embed="rId1"/>
+          <a:stretch>
+            <a:fillRect/>
+          </a:stretch>
+        </p:blipFill>
+        <p:spPr>
+          <a:xfrm>
+            <a:off x="8809685" y="128016"/>
+            <a:ext cx="201168" cy="201168"/>
+          </a:xfrm>
+          <a:prstGeom prst="rect">
+            <a:avLst/>
+          </a:prstGeom>
+        </p:spPr>
+      </p:pic>
+      <p:sp>
+        <p:nvSpPr>
+          <p:cNvPr id="27" name="Text 24"/>
+          <p:cNvSpPr txBox="1"/>
+          <p:nvPr/>
+        </p:nvSpPr>
+        <p:spPr>
+          <a:xfrm>
+            <a:off x="9065717" y="91440"/>
+            <a:ext cx="2540762" cy="274320"/>
+          </a:xfrm>
+          <a:prstGeom prst="rect">
+            <a:avLst/>
+          </a:prstGeom>
+          <a:noFill/>
+          <a:ln/>
+        </p:spPr>
+        <p:txBody>
+          <a:bodyPr wrap="square" lIns="0" tIns="0" rIns="0" bIns="0" rtlCol="0" anchor="ctr"/>
+          <a:lstStyle/>
+          <a:p>
+            <a:pPr indent="0" marL="0">
+              <a:buNone/>
+            </a:pPr>
+            <a:r>
+              <a:rPr lang="en-US" sz="1100" b="1" dirty="0">
+                <a:solidFill>
+                  <a:srgbClr val="075985"/>
+                </a:solidFill>
+                <a:latin typeface="Calibri" pitchFamily="34" charset="0"/>
+                <a:ea typeface="Calibri" pitchFamily="34" charset="-122"/>
+                <a:cs typeface="Calibri" pitchFamily="34" charset="-120"/>
+              </a:rPr>
+              <a:t>UNDERSTAND NOW</a:t>
+            </a:r>
+            <a:pPr indent="0" marL="0">
+              <a:buNone/>
+            </a:pPr>
+            <a:r>
+              <a:rPr lang="en-US" sz="1100" dirty="0">
+                <a:solidFill>
+                  <a:srgbClr val="075985"/>
+                </a:solidFill>
+                <a:latin typeface="Calibri" pitchFamily="34" charset="0"/>
+                <a:ea typeface="Calibri" pitchFamily="34" charset="-122"/>
+                <a:cs typeface="Calibri" pitchFamily="34" charset="-120"/>
+              </a:rPr>
+              <a:t> · shift registers</a:t>
+            </a:r>
+            <a:endParaRPr lang="en-US" sz="1100" dirty="0"/>
+          </a:p>
+        </p:txBody>
+      </p:sp>
+      <p:sp>
+        <p:nvSpPr>
           <p:cNvPr id="25" name="Slide Number Placeholder 0"/>
           <p:cNvSpPr>
             <a:spLocks noGrp="1"/>
@@ -9601,6 +10794,324 @@
               <a:t>Everything in it comes from Lectures 11, 13 and this one</a:t>
             </a:r>
             <a:endParaRPr lang="en-US" sz="1900" dirty="0"/>
+          </a:p>
+        </p:txBody>
+      </p:sp>
+      <p:sp>
+        <p:nvSpPr>
+          <p:cNvPr id="29" name="Shape 27"/>
+          <p:cNvSpPr/>
+          <p:nvPr/>
+        </p:nvSpPr>
+        <p:spPr>
+          <a:xfrm>
+            <a:off x="7086295" y="91440"/>
+            <a:ext cx="4556760" cy="274320"/>
+          </a:xfrm>
+          <a:prstGeom prst="rect">
+            <a:avLst/>
+          </a:prstGeom>
+          <a:solidFill>
+            <a:srgbClr val="F3E8FF"/>
+          </a:solidFill>
+          <a:ln w="12700">
+            <a:solidFill>
+              <a:srgbClr val="7E22CE"/>
+            </a:solidFill>
+            <a:prstDash val="dash"/>
+          </a:ln>
+        </p:spPr>
+      </p:sp>
+      <p:sp>
+        <p:nvSpPr>
+          <p:cNvPr id="30" name="Shape 28"/>
+          <p:cNvSpPr/>
+          <p:nvPr/>
+        </p:nvSpPr>
+        <p:spPr>
+          <a:xfrm>
+            <a:off x="7113727" y="128016"/>
+            <a:ext cx="45720" cy="45720"/>
+          </a:xfrm>
+          <a:prstGeom prst="rect">
+            <a:avLst/>
+          </a:prstGeom>
+          <a:solidFill>
+            <a:srgbClr val="7E22CE"/>
+          </a:solidFill>
+          <a:ln w="12700">
+            <a:solidFill>
+              <a:srgbClr val="7E22CE"/>
+            </a:solidFill>
+            <a:prstDash val="solid"/>
+          </a:ln>
+        </p:spPr>
+      </p:sp>
+      <p:sp>
+        <p:nvSpPr>
+          <p:cNvPr id="31" name="Shape 29"/>
+          <p:cNvSpPr/>
+          <p:nvPr/>
+        </p:nvSpPr>
+        <p:spPr>
+          <a:xfrm>
+            <a:off x="7113727" y="205740"/>
+            <a:ext cx="45720" cy="45720"/>
+          </a:xfrm>
+          <a:prstGeom prst="rect">
+            <a:avLst/>
+          </a:prstGeom>
+          <a:solidFill>
+            <a:srgbClr val="7E22CE"/>
+          </a:solidFill>
+          <a:ln w="12700">
+            <a:solidFill>
+              <a:srgbClr val="7E22CE"/>
+            </a:solidFill>
+            <a:prstDash val="solid"/>
+          </a:ln>
+        </p:spPr>
+      </p:sp>
+      <p:sp>
+        <p:nvSpPr>
+          <p:cNvPr id="32" name="Shape 30"/>
+          <p:cNvSpPr/>
+          <p:nvPr/>
+        </p:nvSpPr>
+        <p:spPr>
+          <a:xfrm>
+            <a:off x="7113727" y="283464"/>
+            <a:ext cx="45720" cy="45720"/>
+          </a:xfrm>
+          <a:prstGeom prst="rect">
+            <a:avLst/>
+          </a:prstGeom>
+          <a:solidFill>
+            <a:srgbClr val="7E22CE"/>
+          </a:solidFill>
+          <a:ln w="12700">
+            <a:solidFill>
+              <a:srgbClr val="7E22CE"/>
+            </a:solidFill>
+            <a:prstDash val="solid"/>
+          </a:ln>
+        </p:spPr>
+      </p:sp>
+      <p:pic>
+        <p:nvPicPr>
+          <p:cNvPr id="33" name="Image 0" descr="preencoded.png">    </p:cNvPr>
+          <p:cNvPicPr>
+            <a:picLocks noChangeAspect="1"/>
+          </p:cNvPicPr>
+          <p:nvPr/>
+        </p:nvPicPr>
+        <p:blipFill>
+          <a:blip r:embed="rId1"/>
+          <a:stretch>
+            <a:fillRect/>
+          </a:stretch>
+        </p:blipFill>
+        <p:spPr>
+          <a:xfrm>
+            <a:off x="7214311" y="128016"/>
+            <a:ext cx="201168" cy="201168"/>
+          </a:xfrm>
+          <a:prstGeom prst="rect">
+            <a:avLst/>
+          </a:prstGeom>
+        </p:spPr>
+      </p:pic>
+      <p:sp>
+        <p:nvSpPr>
+          <p:cNvPr id="34" name="Text 31"/>
+          <p:cNvSpPr txBox="1"/>
+          <p:nvPr/>
+        </p:nvSpPr>
+        <p:spPr>
+          <a:xfrm>
+            <a:off x="7470343" y="91440"/>
+            <a:ext cx="4136136" cy="274320"/>
+          </a:xfrm>
+          <a:prstGeom prst="rect">
+            <a:avLst/>
+          </a:prstGeom>
+          <a:noFill/>
+          <a:ln/>
+        </p:spPr>
+        <p:txBody>
+          <a:bodyPr wrap="square" lIns="0" tIns="0" rIns="0" bIns="0" rtlCol="0" anchor="ctr"/>
+          <a:lstStyle/>
+          <a:p>
+            <a:pPr indent="0" marL="0">
+              <a:buNone/>
+            </a:pPr>
+            <a:r>
+              <a:rPr lang="en-US" sz="1100" b="1" dirty="0">
+                <a:solidFill>
+                  <a:srgbClr val="6B21A8"/>
+                </a:solidFill>
+                <a:latin typeface="Calibri" pitchFamily="34" charset="0"/>
+                <a:ea typeface="Calibri" pitchFamily="34" charset="-122"/>
+                <a:cs typeface="Calibri" pitchFamily="34" charset="-120"/>
+              </a:rPr>
+              <a:t>UNDERSTAND LATER</a:t>
+            </a:r>
+            <a:pPr indent="0" marL="0">
+              <a:buNone/>
+            </a:pPr>
+            <a:r>
+              <a:rPr lang="en-US" sz="1100" dirty="0">
+                <a:solidFill>
+                  <a:srgbClr val="6B21A8"/>
+                </a:solidFill>
+                <a:latin typeface="Calibri" pitchFamily="34" charset="0"/>
+                <a:ea typeface="Calibri" pitchFamily="34" charset="-122"/>
+                <a:cs typeface="Calibri" pitchFamily="34" charset="-120"/>
+              </a:rPr>
+              <a:t> · memories and addresses</a:t>
+            </a:r>
+            <a:pPr indent="0" marL="0">
+              <a:buNone/>
+            </a:pPr>
+            <a:r>
+              <a:rPr lang="en-US" sz="1100" b="1" dirty="0">
+                <a:solidFill>
+                  <a:srgbClr val="6B21A8"/>
+                </a:solidFill>
+                <a:latin typeface="Calibri" pitchFamily="34" charset="0"/>
+                <a:ea typeface="Calibri" pitchFamily="34" charset="-122"/>
+                <a:cs typeface="Calibri" pitchFamily="34" charset="-120"/>
+              </a:rPr>
+              <a:t> → Lecture 15</a:t>
+            </a:r>
+            <a:endParaRPr lang="en-US" sz="1100" dirty="0"/>
+          </a:p>
+        </p:txBody>
+      </p:sp>
+      <p:sp>
+        <p:nvSpPr>
+          <p:cNvPr id="35" name="Shape 32"/>
+          <p:cNvSpPr/>
+          <p:nvPr/>
+        </p:nvSpPr>
+        <p:spPr>
+          <a:xfrm>
+            <a:off x="3489909" y="91440"/>
+            <a:ext cx="3486658" cy="274320"/>
+          </a:xfrm>
+          <a:prstGeom prst="rect">
+            <a:avLst/>
+          </a:prstGeom>
+          <a:solidFill>
+            <a:srgbClr val="E0F2FE"/>
+          </a:solidFill>
+          <a:ln w="12700">
+            <a:solidFill>
+              <a:srgbClr val="0369A1"/>
+            </a:solidFill>
+            <a:prstDash val="solid"/>
+          </a:ln>
+        </p:spPr>
+      </p:sp>
+      <p:sp>
+        <p:nvSpPr>
+          <p:cNvPr id="36" name="Shape 33"/>
+          <p:cNvSpPr/>
+          <p:nvPr/>
+        </p:nvSpPr>
+        <p:spPr>
+          <a:xfrm>
+            <a:off x="3489909" y="91440"/>
+            <a:ext cx="73152" cy="274320"/>
+          </a:xfrm>
+          <a:prstGeom prst="rect">
+            <a:avLst/>
+          </a:prstGeom>
+          <a:solidFill>
+            <a:srgbClr val="0369A1"/>
+          </a:solidFill>
+          <a:ln w="12700">
+            <a:solidFill>
+              <a:srgbClr val="0369A1"/>
+            </a:solidFill>
+            <a:prstDash val="solid"/>
+          </a:ln>
+        </p:spPr>
+      </p:sp>
+      <p:pic>
+        <p:nvPicPr>
+          <p:cNvPr id="37" name="Image 1" descr="preencoded.png">    </p:cNvPr>
+          <p:cNvPicPr>
+            <a:picLocks noChangeAspect="1"/>
+          </p:cNvPicPr>
+          <p:nvPr/>
+        </p:nvPicPr>
+        <p:blipFill>
+          <a:blip r:embed="rId2"/>
+          <a:stretch>
+            <a:fillRect/>
+          </a:stretch>
+        </p:blipFill>
+        <p:spPr>
+          <a:xfrm>
+            <a:off x="3617925" y="128016"/>
+            <a:ext cx="201168" cy="201168"/>
+          </a:xfrm>
+          <a:prstGeom prst="rect">
+            <a:avLst/>
+          </a:prstGeom>
+        </p:spPr>
+      </p:pic>
+      <p:sp>
+        <p:nvSpPr>
+          <p:cNvPr id="38" name="Text 34"/>
+          <p:cNvSpPr txBox="1"/>
+          <p:nvPr/>
+        </p:nvSpPr>
+        <p:spPr>
+          <a:xfrm>
+            <a:off x="3873957" y="91440"/>
+            <a:ext cx="3066034" cy="274320"/>
+          </a:xfrm>
+          <a:prstGeom prst="rect">
+            <a:avLst/>
+          </a:prstGeom>
+          <a:noFill/>
+          <a:ln/>
+        </p:spPr>
+        <p:txBody>
+          <a:bodyPr wrap="square" lIns="0" tIns="0" rIns="0" bIns="0" rtlCol="0" anchor="ctr"/>
+          <a:lstStyle/>
+          <a:p>
+            <a:pPr indent="0" marL="0">
+              <a:buNone/>
+            </a:pPr>
+            <a:r>
+              <a:rPr lang="en-US" sz="1100" b="1" dirty="0">
+                <a:solidFill>
+                  <a:srgbClr val="075985"/>
+                </a:solidFill>
+                <a:latin typeface="Calibri" pitchFamily="34" charset="0"/>
+                <a:ea typeface="Calibri" pitchFamily="34" charset="-122"/>
+                <a:cs typeface="Calibri" pitchFamily="34" charset="-120"/>
+              </a:rPr>
+              <a:t>UNDERSTAND NOW</a:t>
+            </a:r>
+            <a:pPr indent="0" marL="0">
+              <a:buNone/>
+            </a:pPr>
+            <a:r>
+              <a:rPr lang="en-US" sz="1100" dirty="0">
+                <a:solidFill>
+                  <a:srgbClr val="075985"/>
+                </a:solidFill>
+                <a:latin typeface="Calibri" pitchFamily="34" charset="0"/>
+                <a:ea typeface="Calibri" pitchFamily="34" charset="-122"/>
+                <a:cs typeface="Calibri" pitchFamily="34" charset="-120"/>
+              </a:rPr>
+              <a:t> · registers as flip-flops</a:t>
+            </a:r>
+            <a:endParaRPr lang="en-US" sz="1100" dirty="0"/>
           </a:p>
         </p:txBody>
       </p:sp>
@@ -14900,6 +16411,133 @@
       </p:sp>
       <p:sp>
         <p:nvSpPr>
+          <p:cNvPr id="16" name="Shape 14"/>
+          <p:cNvSpPr/>
+          <p:nvPr/>
+        </p:nvSpPr>
+        <p:spPr>
+          <a:xfrm>
+            <a:off x="8156397" y="91440"/>
+            <a:ext cx="3486658" cy="274320"/>
+          </a:xfrm>
+          <a:prstGeom prst="rect">
+            <a:avLst/>
+          </a:prstGeom>
+          <a:solidFill>
+            <a:srgbClr val="E0F2FE"/>
+          </a:solidFill>
+          <a:ln w="12700">
+            <a:solidFill>
+              <a:srgbClr val="0369A1"/>
+            </a:solidFill>
+            <a:prstDash val="solid"/>
+          </a:ln>
+        </p:spPr>
+      </p:sp>
+      <p:sp>
+        <p:nvSpPr>
+          <p:cNvPr id="17" name="Shape 15"/>
+          <p:cNvSpPr/>
+          <p:nvPr/>
+        </p:nvSpPr>
+        <p:spPr>
+          <a:xfrm>
+            <a:off x="8156397" y="91440"/>
+            <a:ext cx="73152" cy="274320"/>
+          </a:xfrm>
+          <a:prstGeom prst="rect">
+            <a:avLst/>
+          </a:prstGeom>
+          <a:solidFill>
+            <a:srgbClr val="0369A1"/>
+          </a:solidFill>
+          <a:ln w="12700">
+            <a:solidFill>
+              <a:srgbClr val="0369A1"/>
+            </a:solidFill>
+            <a:prstDash val="solid"/>
+          </a:ln>
+        </p:spPr>
+      </p:sp>
+      <p:pic>
+        <p:nvPicPr>
+          <p:cNvPr id="18" name="Image 0" descr="preencoded.png">    </p:cNvPr>
+          <p:cNvPicPr>
+            <a:picLocks noChangeAspect="1"/>
+          </p:cNvPicPr>
+          <p:nvPr/>
+        </p:nvPicPr>
+        <p:blipFill>
+          <a:blip r:embed="rId1"/>
+          <a:stretch>
+            <a:fillRect/>
+          </a:stretch>
+        </p:blipFill>
+        <p:spPr>
+          <a:xfrm>
+            <a:off x="8284413" y="128016"/>
+            <a:ext cx="201168" cy="201168"/>
+          </a:xfrm>
+          <a:prstGeom prst="rect">
+            <a:avLst/>
+          </a:prstGeom>
+        </p:spPr>
+      </p:pic>
+      <p:sp>
+        <p:nvSpPr>
+          <p:cNvPr id="19" name="Text 16"/>
+          <p:cNvSpPr txBox="1"/>
+          <p:nvPr/>
+        </p:nvSpPr>
+        <p:spPr>
+          <a:xfrm>
+            <a:off x="8540445" y="91440"/>
+            <a:ext cx="3066034" cy="274320"/>
+          </a:xfrm>
+          <a:prstGeom prst="rect">
+            <a:avLst/>
+          </a:prstGeom>
+          <a:noFill/>
+          <a:ln/>
+        </p:spPr>
+        <p:txBody>
+          <a:bodyPr wrap="square" lIns="0" tIns="0" rIns="0" bIns="0" rtlCol="0" anchor="ctr"/>
+          <a:lstStyle/>
+          <a:p>
+            <a:pPr indent="0" marL="0">
+              <a:buNone/>
+            </a:pPr>
+            <a:r>
+              <a:rPr lang="en-US" sz="1100" b="1" dirty="0">
+                <a:solidFill>
+                  <a:srgbClr val="075985"/>
+                </a:solidFill>
+                <a:latin typeface="Calibri" pitchFamily="34" charset="0"/>
+                <a:ea typeface="Calibri" pitchFamily="34" charset="-122"/>
+                <a:cs typeface="Calibri" pitchFamily="34" charset="-120"/>
+              </a:rPr>
+              <a:t>UNDERSTAND NOW</a:t>
+            </a:r>
+            <a:pPr indent="0" marL="0">
+              <a:buNone/>
+            </a:pPr>
+            <a:r>
+              <a:rPr lang="en-US" sz="1100" dirty="0">
+                <a:solidFill>
+                  <a:srgbClr val="075985"/>
+                </a:solidFill>
+                <a:latin typeface="Calibri" pitchFamily="34" charset="0"/>
+                <a:ea typeface="Calibri" pitchFamily="34" charset="-122"/>
+                <a:cs typeface="Calibri" pitchFamily="34" charset="-120"/>
+              </a:rPr>
+              <a:t> · registers as flip-flops</a:t>
+            </a:r>
+            <a:endParaRPr lang="en-US" sz="1100" dirty="0"/>
+          </a:p>
+        </p:txBody>
+      </p:sp>
+      <p:sp>
+        <p:nvSpPr>
           <p:cNvPr id="25" name="Slide Number Placeholder 0"/>
           <p:cNvSpPr>
             <a:spLocks noGrp="1"/>
@@ -15432,6 +17070,133 @@
       </p:sp>
       <p:sp>
         <p:nvSpPr>
+          <p:cNvPr id="15" name="Shape 12"/>
+          <p:cNvSpPr/>
+          <p:nvPr/>
+        </p:nvSpPr>
+        <p:spPr>
+          <a:xfrm>
+            <a:off x="8156397" y="91440"/>
+            <a:ext cx="3486658" cy="274320"/>
+          </a:xfrm>
+          <a:prstGeom prst="rect">
+            <a:avLst/>
+          </a:prstGeom>
+          <a:solidFill>
+            <a:srgbClr val="E0F2FE"/>
+          </a:solidFill>
+          <a:ln w="12700">
+            <a:solidFill>
+              <a:srgbClr val="0369A1"/>
+            </a:solidFill>
+            <a:prstDash val="solid"/>
+          </a:ln>
+        </p:spPr>
+      </p:sp>
+      <p:sp>
+        <p:nvSpPr>
+          <p:cNvPr id="16" name="Shape 13"/>
+          <p:cNvSpPr/>
+          <p:nvPr/>
+        </p:nvSpPr>
+        <p:spPr>
+          <a:xfrm>
+            <a:off x="8156397" y="91440"/>
+            <a:ext cx="73152" cy="274320"/>
+          </a:xfrm>
+          <a:prstGeom prst="rect">
+            <a:avLst/>
+          </a:prstGeom>
+          <a:solidFill>
+            <a:srgbClr val="0369A1"/>
+          </a:solidFill>
+          <a:ln w="12700">
+            <a:solidFill>
+              <a:srgbClr val="0369A1"/>
+            </a:solidFill>
+            <a:prstDash val="solid"/>
+          </a:ln>
+        </p:spPr>
+      </p:sp>
+      <p:pic>
+        <p:nvPicPr>
+          <p:cNvPr id="17" name="Image 1" descr="preencoded.png">    </p:cNvPr>
+          <p:cNvPicPr>
+            <a:picLocks noChangeAspect="1"/>
+          </p:cNvPicPr>
+          <p:nvPr/>
+        </p:nvPicPr>
+        <p:blipFill>
+          <a:blip r:embed="rId2"/>
+          <a:stretch>
+            <a:fillRect/>
+          </a:stretch>
+        </p:blipFill>
+        <p:spPr>
+          <a:xfrm>
+            <a:off x="8284413" y="128016"/>
+            <a:ext cx="201168" cy="201168"/>
+          </a:xfrm>
+          <a:prstGeom prst="rect">
+            <a:avLst/>
+          </a:prstGeom>
+        </p:spPr>
+      </p:pic>
+      <p:sp>
+        <p:nvSpPr>
+          <p:cNvPr id="18" name="Text 14"/>
+          <p:cNvSpPr txBox="1"/>
+          <p:nvPr/>
+        </p:nvSpPr>
+        <p:spPr>
+          <a:xfrm>
+            <a:off x="8540445" y="91440"/>
+            <a:ext cx="3066034" cy="274320"/>
+          </a:xfrm>
+          <a:prstGeom prst="rect">
+            <a:avLst/>
+          </a:prstGeom>
+          <a:noFill/>
+          <a:ln/>
+        </p:spPr>
+        <p:txBody>
+          <a:bodyPr wrap="square" lIns="0" tIns="0" rIns="0" bIns="0" rtlCol="0" anchor="ctr"/>
+          <a:lstStyle/>
+          <a:p>
+            <a:pPr indent="0" marL="0">
+              <a:buNone/>
+            </a:pPr>
+            <a:r>
+              <a:rPr lang="en-US" sz="1100" b="1" dirty="0">
+                <a:solidFill>
+                  <a:srgbClr val="075985"/>
+                </a:solidFill>
+                <a:latin typeface="Calibri" pitchFamily="34" charset="0"/>
+                <a:ea typeface="Calibri" pitchFamily="34" charset="-122"/>
+                <a:cs typeface="Calibri" pitchFamily="34" charset="-120"/>
+              </a:rPr>
+              <a:t>UNDERSTAND NOW</a:t>
+            </a:r>
+            <a:pPr indent="0" marL="0">
+              <a:buNone/>
+            </a:pPr>
+            <a:r>
+              <a:rPr lang="en-US" sz="1100" dirty="0">
+                <a:solidFill>
+                  <a:srgbClr val="075985"/>
+                </a:solidFill>
+                <a:latin typeface="Calibri" pitchFamily="34" charset="0"/>
+                <a:ea typeface="Calibri" pitchFamily="34" charset="-122"/>
+                <a:cs typeface="Calibri" pitchFamily="34" charset="-120"/>
+              </a:rPr>
+              <a:t> · registers as flip-flops</a:t>
+            </a:r>
+            <a:endParaRPr lang="en-US" sz="1100" dirty="0"/>
+          </a:p>
+        </p:txBody>
+      </p:sp>
+      <p:sp>
+        <p:nvSpPr>
           <p:cNvPr id="25" name="Slide Number Placeholder 0"/>
           <p:cNvSpPr>
             <a:spLocks noGrp="1"/>
@@ -15852,6 +17617,133 @@
       </p:sp>
       <p:sp>
         <p:nvSpPr>
+          <p:cNvPr id="12" name="Shape 10"/>
+          <p:cNvSpPr/>
+          <p:nvPr/>
+        </p:nvSpPr>
+        <p:spPr>
+          <a:xfrm>
+            <a:off x="7893761" y="91440"/>
+            <a:ext cx="3749294" cy="274320"/>
+          </a:xfrm>
+          <a:prstGeom prst="rect">
+            <a:avLst/>
+          </a:prstGeom>
+          <a:solidFill>
+            <a:srgbClr val="E0F2FE"/>
+          </a:solidFill>
+          <a:ln w="12700">
+            <a:solidFill>
+              <a:srgbClr val="0369A1"/>
+            </a:solidFill>
+            <a:prstDash val="solid"/>
+          </a:ln>
+        </p:spPr>
+      </p:sp>
+      <p:sp>
+        <p:nvSpPr>
+          <p:cNvPr id="13" name="Shape 11"/>
+          <p:cNvSpPr/>
+          <p:nvPr/>
+        </p:nvSpPr>
+        <p:spPr>
+          <a:xfrm>
+            <a:off x="7893761" y="91440"/>
+            <a:ext cx="73152" cy="274320"/>
+          </a:xfrm>
+          <a:prstGeom prst="rect">
+            <a:avLst/>
+          </a:prstGeom>
+          <a:solidFill>
+            <a:srgbClr val="0369A1"/>
+          </a:solidFill>
+          <a:ln w="12700">
+            <a:solidFill>
+              <a:srgbClr val="0369A1"/>
+            </a:solidFill>
+            <a:prstDash val="solid"/>
+          </a:ln>
+        </p:spPr>
+      </p:sp>
+      <p:pic>
+        <p:nvPicPr>
+          <p:cNvPr id="14" name="Image 0" descr="preencoded.png">    </p:cNvPr>
+          <p:cNvPicPr>
+            <a:picLocks noChangeAspect="1"/>
+          </p:cNvPicPr>
+          <p:nvPr/>
+        </p:nvPicPr>
+        <p:blipFill>
+          <a:blip r:embed="rId1"/>
+          <a:stretch>
+            <a:fillRect/>
+          </a:stretch>
+        </p:blipFill>
+        <p:spPr>
+          <a:xfrm>
+            <a:off x="8021777" y="128016"/>
+            <a:ext cx="201168" cy="201168"/>
+          </a:xfrm>
+          <a:prstGeom prst="rect">
+            <a:avLst/>
+          </a:prstGeom>
+        </p:spPr>
+      </p:pic>
+      <p:sp>
+        <p:nvSpPr>
+          <p:cNvPr id="15" name="Text 12"/>
+          <p:cNvSpPr txBox="1"/>
+          <p:nvPr/>
+        </p:nvSpPr>
+        <p:spPr>
+          <a:xfrm>
+            <a:off x="8277809" y="91440"/>
+            <a:ext cx="3328670" cy="274320"/>
+          </a:xfrm>
+          <a:prstGeom prst="rect">
+            <a:avLst/>
+          </a:prstGeom>
+          <a:noFill/>
+          <a:ln/>
+        </p:spPr>
+        <p:txBody>
+          <a:bodyPr wrap="square" lIns="0" tIns="0" rIns="0" bIns="0" rtlCol="0" anchor="ctr"/>
+          <a:lstStyle/>
+          <a:p>
+            <a:pPr indent="0" marL="0">
+              <a:buNone/>
+            </a:pPr>
+            <a:r>
+              <a:rPr lang="en-US" sz="1100" b="1" dirty="0">
+                <a:solidFill>
+                  <a:srgbClr val="075985"/>
+                </a:solidFill>
+                <a:latin typeface="Calibri" pitchFamily="34" charset="0"/>
+                <a:ea typeface="Calibri" pitchFamily="34" charset="-122"/>
+                <a:cs typeface="Calibri" pitchFamily="34" charset="-120"/>
+              </a:rPr>
+              <a:t>UNDERSTAND NOW</a:t>
+            </a:r>
+            <a:pPr indent="0" marL="0">
+              <a:buNone/>
+            </a:pPr>
+            <a:r>
+              <a:rPr lang="en-US" sz="1100" dirty="0">
+                <a:solidFill>
+                  <a:srgbClr val="075985"/>
+                </a:solidFill>
+                <a:latin typeface="Calibri" pitchFamily="34" charset="0"/>
+                <a:ea typeface="Calibri" pitchFamily="34" charset="-122"/>
+                <a:cs typeface="Calibri" pitchFamily="34" charset="-120"/>
+              </a:rPr>
+              <a:t> · buses and three-state gates</a:t>
+            </a:r>
+            <a:endParaRPr lang="en-US" sz="1100" dirty="0"/>
+          </a:p>
+        </p:txBody>
+      </p:sp>
+      <p:sp>
+        <p:nvSpPr>
           <p:cNvPr id="25" name="Slide Number Placeholder 0"/>
           <p:cNvSpPr>
             <a:spLocks noGrp="1"/>
@@ -16305,6 +18197,133 @@
       </p:sp>
       <p:sp>
         <p:nvSpPr>
+          <p:cNvPr id="9" name="Shape 7"/>
+          <p:cNvSpPr/>
+          <p:nvPr/>
+        </p:nvSpPr>
+        <p:spPr>
+          <a:xfrm>
+            <a:off x="7893761" y="91440"/>
+            <a:ext cx="3749294" cy="274320"/>
+          </a:xfrm>
+          <a:prstGeom prst="rect">
+            <a:avLst/>
+          </a:prstGeom>
+          <a:solidFill>
+            <a:srgbClr val="E0F2FE"/>
+          </a:solidFill>
+          <a:ln w="12700">
+            <a:solidFill>
+              <a:srgbClr val="0369A1"/>
+            </a:solidFill>
+            <a:prstDash val="solid"/>
+          </a:ln>
+        </p:spPr>
+      </p:sp>
+      <p:sp>
+        <p:nvSpPr>
+          <p:cNvPr id="10" name="Shape 8"/>
+          <p:cNvSpPr/>
+          <p:nvPr/>
+        </p:nvSpPr>
+        <p:spPr>
+          <a:xfrm>
+            <a:off x="7893761" y="91440"/>
+            <a:ext cx="73152" cy="274320"/>
+          </a:xfrm>
+          <a:prstGeom prst="rect">
+            <a:avLst/>
+          </a:prstGeom>
+          <a:solidFill>
+            <a:srgbClr val="0369A1"/>
+          </a:solidFill>
+          <a:ln w="12700">
+            <a:solidFill>
+              <a:srgbClr val="0369A1"/>
+            </a:solidFill>
+            <a:prstDash val="solid"/>
+          </a:ln>
+        </p:spPr>
+      </p:sp>
+      <p:pic>
+        <p:nvPicPr>
+          <p:cNvPr id="11" name="Image 0" descr="preencoded.png">    </p:cNvPr>
+          <p:cNvPicPr>
+            <a:picLocks noChangeAspect="1"/>
+          </p:cNvPicPr>
+          <p:nvPr/>
+        </p:nvPicPr>
+        <p:blipFill>
+          <a:blip r:embed="rId1"/>
+          <a:stretch>
+            <a:fillRect/>
+          </a:stretch>
+        </p:blipFill>
+        <p:spPr>
+          <a:xfrm>
+            <a:off x="8021777" y="128016"/>
+            <a:ext cx="201168" cy="201168"/>
+          </a:xfrm>
+          <a:prstGeom prst="rect">
+            <a:avLst/>
+          </a:prstGeom>
+        </p:spPr>
+      </p:pic>
+      <p:sp>
+        <p:nvSpPr>
+          <p:cNvPr id="12" name="Text 9"/>
+          <p:cNvSpPr txBox="1"/>
+          <p:nvPr/>
+        </p:nvSpPr>
+        <p:spPr>
+          <a:xfrm>
+            <a:off x="8277809" y="91440"/>
+            <a:ext cx="3328670" cy="274320"/>
+          </a:xfrm>
+          <a:prstGeom prst="rect">
+            <a:avLst/>
+          </a:prstGeom>
+          <a:noFill/>
+          <a:ln/>
+        </p:spPr>
+        <p:txBody>
+          <a:bodyPr wrap="square" lIns="0" tIns="0" rIns="0" bIns="0" rtlCol="0" anchor="ctr"/>
+          <a:lstStyle/>
+          <a:p>
+            <a:pPr indent="0" marL="0">
+              <a:buNone/>
+            </a:pPr>
+            <a:r>
+              <a:rPr lang="en-US" sz="1100" b="1" dirty="0">
+                <a:solidFill>
+                  <a:srgbClr val="075985"/>
+                </a:solidFill>
+                <a:latin typeface="Calibri" pitchFamily="34" charset="0"/>
+                <a:ea typeface="Calibri" pitchFamily="34" charset="-122"/>
+                <a:cs typeface="Calibri" pitchFamily="34" charset="-120"/>
+              </a:rPr>
+              <a:t>UNDERSTAND NOW</a:t>
+            </a:r>
+            <a:pPr indent="0" marL="0">
+              <a:buNone/>
+            </a:pPr>
+            <a:r>
+              <a:rPr lang="en-US" sz="1100" dirty="0">
+                <a:solidFill>
+                  <a:srgbClr val="075985"/>
+                </a:solidFill>
+                <a:latin typeface="Calibri" pitchFamily="34" charset="0"/>
+                <a:ea typeface="Calibri" pitchFamily="34" charset="-122"/>
+                <a:cs typeface="Calibri" pitchFamily="34" charset="-120"/>
+              </a:rPr>
+              <a:t> · buses and three-state gates</a:t>
+            </a:r>
+            <a:endParaRPr lang="en-US" sz="1100" dirty="0"/>
+          </a:p>
+        </p:txBody>
+      </p:sp>
+      <p:sp>
+        <p:nvSpPr>
           <p:cNvPr id="25" name="Slide Number Placeholder 0"/>
           <p:cNvSpPr>
             <a:spLocks noGrp="1"/>
@@ -16817,6 +18836,133 @@
       </p:sp>
       <p:sp>
         <p:nvSpPr>
+          <p:cNvPr id="15" name="Shape 12"/>
+          <p:cNvSpPr/>
+          <p:nvPr/>
+        </p:nvSpPr>
+        <p:spPr>
+          <a:xfrm>
+            <a:off x="7893761" y="91440"/>
+            <a:ext cx="3749294" cy="274320"/>
+          </a:xfrm>
+          <a:prstGeom prst="rect">
+            <a:avLst/>
+          </a:prstGeom>
+          <a:solidFill>
+            <a:srgbClr val="E0F2FE"/>
+          </a:solidFill>
+          <a:ln w="12700">
+            <a:solidFill>
+              <a:srgbClr val="0369A1"/>
+            </a:solidFill>
+            <a:prstDash val="solid"/>
+          </a:ln>
+        </p:spPr>
+      </p:sp>
+      <p:sp>
+        <p:nvSpPr>
+          <p:cNvPr id="16" name="Shape 13"/>
+          <p:cNvSpPr/>
+          <p:nvPr/>
+        </p:nvSpPr>
+        <p:spPr>
+          <a:xfrm>
+            <a:off x="7893761" y="91440"/>
+            <a:ext cx="73152" cy="274320"/>
+          </a:xfrm>
+          <a:prstGeom prst="rect">
+            <a:avLst/>
+          </a:prstGeom>
+          <a:solidFill>
+            <a:srgbClr val="0369A1"/>
+          </a:solidFill>
+          <a:ln w="12700">
+            <a:solidFill>
+              <a:srgbClr val="0369A1"/>
+            </a:solidFill>
+            <a:prstDash val="solid"/>
+          </a:ln>
+        </p:spPr>
+      </p:sp>
+      <p:pic>
+        <p:nvPicPr>
+          <p:cNvPr id="17" name="Image 1" descr="preencoded.png">    </p:cNvPr>
+          <p:cNvPicPr>
+            <a:picLocks noChangeAspect="1"/>
+          </p:cNvPicPr>
+          <p:nvPr/>
+        </p:nvPicPr>
+        <p:blipFill>
+          <a:blip r:embed="rId2"/>
+          <a:stretch>
+            <a:fillRect/>
+          </a:stretch>
+        </p:blipFill>
+        <p:spPr>
+          <a:xfrm>
+            <a:off x="8021777" y="128016"/>
+            <a:ext cx="201168" cy="201168"/>
+          </a:xfrm>
+          <a:prstGeom prst="rect">
+            <a:avLst/>
+          </a:prstGeom>
+        </p:spPr>
+      </p:pic>
+      <p:sp>
+        <p:nvSpPr>
+          <p:cNvPr id="18" name="Text 14"/>
+          <p:cNvSpPr txBox="1"/>
+          <p:nvPr/>
+        </p:nvSpPr>
+        <p:spPr>
+          <a:xfrm>
+            <a:off x="8277809" y="91440"/>
+            <a:ext cx="3328670" cy="274320"/>
+          </a:xfrm>
+          <a:prstGeom prst="rect">
+            <a:avLst/>
+          </a:prstGeom>
+          <a:noFill/>
+          <a:ln/>
+        </p:spPr>
+        <p:txBody>
+          <a:bodyPr wrap="square" lIns="0" tIns="0" rIns="0" bIns="0" rtlCol="0" anchor="ctr"/>
+          <a:lstStyle/>
+          <a:p>
+            <a:pPr indent="0" marL="0">
+              <a:buNone/>
+            </a:pPr>
+            <a:r>
+              <a:rPr lang="en-US" sz="1100" b="1" dirty="0">
+                <a:solidFill>
+                  <a:srgbClr val="075985"/>
+                </a:solidFill>
+                <a:latin typeface="Calibri" pitchFamily="34" charset="0"/>
+                <a:ea typeface="Calibri" pitchFamily="34" charset="-122"/>
+                <a:cs typeface="Calibri" pitchFamily="34" charset="-120"/>
+              </a:rPr>
+              <a:t>UNDERSTAND NOW</a:t>
+            </a:r>
+            <a:pPr indent="0" marL="0">
+              <a:buNone/>
+            </a:pPr>
+            <a:r>
+              <a:rPr lang="en-US" sz="1100" dirty="0">
+                <a:solidFill>
+                  <a:srgbClr val="075985"/>
+                </a:solidFill>
+                <a:latin typeface="Calibri" pitchFamily="34" charset="0"/>
+                <a:ea typeface="Calibri" pitchFamily="34" charset="-122"/>
+                <a:cs typeface="Calibri" pitchFamily="34" charset="-120"/>
+              </a:rPr>
+              <a:t> · buses and three-state gates</a:t>
+            </a:r>
+            <a:endParaRPr lang="en-US" sz="1100" dirty="0"/>
+          </a:p>
+        </p:txBody>
+      </p:sp>
+      <p:sp>
+        <p:nvSpPr>
           <p:cNvPr id="25" name="Slide Number Placeholder 0"/>
           <p:cNvSpPr>
             <a:spLocks noGrp="1"/>
@@ -17467,6 +19613,133 @@
               <a:t>From register to bus: the outputs of R reach the bus only while the enable signal c is active. What happens to the bus when it is not?</a:t>
             </a:r>
             <a:endParaRPr lang="en-US" sz="1550" dirty="0"/>
+          </a:p>
+        </p:txBody>
+      </p:sp>
+      <p:sp>
+        <p:nvSpPr>
+          <p:cNvPr id="19" name="Shape 17"/>
+          <p:cNvSpPr/>
+          <p:nvPr/>
+        </p:nvSpPr>
+        <p:spPr>
+          <a:xfrm>
+            <a:off x="7893761" y="91440"/>
+            <a:ext cx="3749294" cy="274320"/>
+          </a:xfrm>
+          <a:prstGeom prst="rect">
+            <a:avLst/>
+          </a:prstGeom>
+          <a:solidFill>
+            <a:srgbClr val="E0F2FE"/>
+          </a:solidFill>
+          <a:ln w="12700">
+            <a:solidFill>
+              <a:srgbClr val="0369A1"/>
+            </a:solidFill>
+            <a:prstDash val="solid"/>
+          </a:ln>
+        </p:spPr>
+      </p:sp>
+      <p:sp>
+        <p:nvSpPr>
+          <p:cNvPr id="20" name="Shape 18"/>
+          <p:cNvSpPr/>
+          <p:nvPr/>
+        </p:nvSpPr>
+        <p:spPr>
+          <a:xfrm>
+            <a:off x="7893761" y="91440"/>
+            <a:ext cx="73152" cy="274320"/>
+          </a:xfrm>
+          <a:prstGeom prst="rect">
+            <a:avLst/>
+          </a:prstGeom>
+          <a:solidFill>
+            <a:srgbClr val="0369A1"/>
+          </a:solidFill>
+          <a:ln w="12700">
+            <a:solidFill>
+              <a:srgbClr val="0369A1"/>
+            </a:solidFill>
+            <a:prstDash val="solid"/>
+          </a:ln>
+        </p:spPr>
+      </p:sp>
+      <p:pic>
+        <p:nvPicPr>
+          <p:cNvPr id="21" name="Image 0" descr="preencoded.png">    </p:cNvPr>
+          <p:cNvPicPr>
+            <a:picLocks noChangeAspect="1"/>
+          </p:cNvPicPr>
+          <p:nvPr/>
+        </p:nvPicPr>
+        <p:blipFill>
+          <a:blip r:embed="rId1"/>
+          <a:stretch>
+            <a:fillRect/>
+          </a:stretch>
+        </p:blipFill>
+        <p:spPr>
+          <a:xfrm>
+            <a:off x="8021777" y="128016"/>
+            <a:ext cx="201168" cy="201168"/>
+          </a:xfrm>
+          <a:prstGeom prst="rect">
+            <a:avLst/>
+          </a:prstGeom>
+        </p:spPr>
+      </p:pic>
+      <p:sp>
+        <p:nvSpPr>
+          <p:cNvPr id="22" name="Text 19"/>
+          <p:cNvSpPr txBox="1"/>
+          <p:nvPr/>
+        </p:nvSpPr>
+        <p:spPr>
+          <a:xfrm>
+            <a:off x="8277809" y="91440"/>
+            <a:ext cx="3328670" cy="274320"/>
+          </a:xfrm>
+          <a:prstGeom prst="rect">
+            <a:avLst/>
+          </a:prstGeom>
+          <a:noFill/>
+          <a:ln/>
+        </p:spPr>
+        <p:txBody>
+          <a:bodyPr wrap="square" lIns="0" tIns="0" rIns="0" bIns="0" rtlCol="0" anchor="ctr"/>
+          <a:lstStyle/>
+          <a:p>
+            <a:pPr indent="0" marL="0">
+              <a:buNone/>
+            </a:pPr>
+            <a:r>
+              <a:rPr lang="en-US" sz="1100" b="1" dirty="0">
+                <a:solidFill>
+                  <a:srgbClr val="075985"/>
+                </a:solidFill>
+                <a:latin typeface="Calibri" pitchFamily="34" charset="0"/>
+                <a:ea typeface="Calibri" pitchFamily="34" charset="-122"/>
+                <a:cs typeface="Calibri" pitchFamily="34" charset="-120"/>
+              </a:rPr>
+              <a:t>UNDERSTAND NOW</a:t>
+            </a:r>
+            <a:pPr indent="0" marL="0">
+              <a:buNone/>
+            </a:pPr>
+            <a:r>
+              <a:rPr lang="en-US" sz="1100" dirty="0">
+                <a:solidFill>
+                  <a:srgbClr val="075985"/>
+                </a:solidFill>
+                <a:latin typeface="Calibri" pitchFamily="34" charset="0"/>
+                <a:ea typeface="Calibri" pitchFamily="34" charset="-122"/>
+                <a:cs typeface="Calibri" pitchFamily="34" charset="-120"/>
+              </a:rPr>
+              <a:t> · buses and three-state gates</a:t>
+            </a:r>
+            <a:endParaRPr lang="en-US" sz="1100" dirty="0"/>
           </a:p>
         </p:txBody>
       </p:sp>
@@ -19636,6 +21909,133 @@
       </p:sp>
       <p:sp>
         <p:nvSpPr>
+          <p:cNvPr id="15" name="Shape 12"/>
+          <p:cNvSpPr/>
+          <p:nvPr/>
+        </p:nvSpPr>
+        <p:spPr>
+          <a:xfrm>
+            <a:off x="7893761" y="91440"/>
+            <a:ext cx="3749294" cy="274320"/>
+          </a:xfrm>
+          <a:prstGeom prst="rect">
+            <a:avLst/>
+          </a:prstGeom>
+          <a:solidFill>
+            <a:srgbClr val="E0F2FE"/>
+          </a:solidFill>
+          <a:ln w="12700">
+            <a:solidFill>
+              <a:srgbClr val="0369A1"/>
+            </a:solidFill>
+            <a:prstDash val="solid"/>
+          </a:ln>
+        </p:spPr>
+      </p:sp>
+      <p:sp>
+        <p:nvSpPr>
+          <p:cNvPr id="16" name="Shape 13"/>
+          <p:cNvSpPr/>
+          <p:nvPr/>
+        </p:nvSpPr>
+        <p:spPr>
+          <a:xfrm>
+            <a:off x="7893761" y="91440"/>
+            <a:ext cx="73152" cy="274320"/>
+          </a:xfrm>
+          <a:prstGeom prst="rect">
+            <a:avLst/>
+          </a:prstGeom>
+          <a:solidFill>
+            <a:srgbClr val="0369A1"/>
+          </a:solidFill>
+          <a:ln w="12700">
+            <a:solidFill>
+              <a:srgbClr val="0369A1"/>
+            </a:solidFill>
+            <a:prstDash val="solid"/>
+          </a:ln>
+        </p:spPr>
+      </p:sp>
+      <p:pic>
+        <p:nvPicPr>
+          <p:cNvPr id="17" name="Image 0" descr="preencoded.png">    </p:cNvPr>
+          <p:cNvPicPr>
+            <a:picLocks noChangeAspect="1"/>
+          </p:cNvPicPr>
+          <p:nvPr/>
+        </p:nvPicPr>
+        <p:blipFill>
+          <a:blip r:embed="rId1"/>
+          <a:stretch>
+            <a:fillRect/>
+          </a:stretch>
+        </p:blipFill>
+        <p:spPr>
+          <a:xfrm>
+            <a:off x="8021777" y="128016"/>
+            <a:ext cx="201168" cy="201168"/>
+          </a:xfrm>
+          <a:prstGeom prst="rect">
+            <a:avLst/>
+          </a:prstGeom>
+        </p:spPr>
+      </p:pic>
+      <p:sp>
+        <p:nvSpPr>
+          <p:cNvPr id="18" name="Text 14"/>
+          <p:cNvSpPr txBox="1"/>
+          <p:nvPr/>
+        </p:nvSpPr>
+        <p:spPr>
+          <a:xfrm>
+            <a:off x="8277809" y="91440"/>
+            <a:ext cx="3328670" cy="274320"/>
+          </a:xfrm>
+          <a:prstGeom prst="rect">
+            <a:avLst/>
+          </a:prstGeom>
+          <a:noFill/>
+          <a:ln/>
+        </p:spPr>
+        <p:txBody>
+          <a:bodyPr wrap="square" lIns="0" tIns="0" rIns="0" bIns="0" rtlCol="0" anchor="ctr"/>
+          <a:lstStyle/>
+          <a:p>
+            <a:pPr indent="0" marL="0">
+              <a:buNone/>
+            </a:pPr>
+            <a:r>
+              <a:rPr lang="en-US" sz="1100" b="1" dirty="0">
+                <a:solidFill>
+                  <a:srgbClr val="075985"/>
+                </a:solidFill>
+                <a:latin typeface="Calibri" pitchFamily="34" charset="0"/>
+                <a:ea typeface="Calibri" pitchFamily="34" charset="-122"/>
+                <a:cs typeface="Calibri" pitchFamily="34" charset="-120"/>
+              </a:rPr>
+              <a:t>UNDERSTAND NOW</a:t>
+            </a:r>
+            <a:pPr indent="0" marL="0">
+              <a:buNone/>
+            </a:pPr>
+            <a:r>
+              <a:rPr lang="en-US" sz="1100" dirty="0">
+                <a:solidFill>
+                  <a:srgbClr val="075985"/>
+                </a:solidFill>
+                <a:latin typeface="Calibri" pitchFamily="34" charset="0"/>
+                <a:ea typeface="Calibri" pitchFamily="34" charset="-122"/>
+                <a:cs typeface="Calibri" pitchFamily="34" charset="-120"/>
+              </a:rPr>
+              <a:t> · buses and three-state gates</a:t>
+            </a:r>
+            <a:endParaRPr lang="en-US" sz="1100" dirty="0"/>
+          </a:p>
+        </p:txBody>
+      </p:sp>
+      <p:sp>
+        <p:nvSpPr>
           <p:cNvPr id="25" name="Slide Number Placeholder 0"/>
           <p:cNvSpPr>
             <a:spLocks noGrp="1"/>

--- a/en/slides/14-Computer_Architecture-Registers_and_Buses.pptx
+++ b/en/slides/14-Computer_Architecture-Registers_and_Buses.pptx
@@ -126,19 +126,19 @@
   <p:extLst>
     <p:ext uri="{521415D9-36F7-43E2-AB2F-B90AF26B5E84}">
       <p14:sectionLst xmlns:p14="http://schemas.microsoft.com/office/powerpoint/2010/main">
-        <p14:section name="Opening" id="{df8ddb8b-0500-44d7-9e39-90e955afd706}">
+        <p14:section name="Opening" id="{1d267d4f-e471-5873-0964-4ac24fada85e}">
           <p14:sldIdLst>
             <p14:sldId id="256"/>
             <p14:sldId id="257"/>
           </p14:sldIdLst>
         </p14:section>
-        <p14:section name="Word gates and registers" id="{a4530b8d-f023-13f8-add2-b0ed947e783e}">
+        <p14:section name="Word gates and registers" id="{ee3a0554-e2ff-8815-e9d6-1cd98a47ad31}">
           <p14:sldIdLst>
             <p14:sldId id="258"/>
             <p14:sldId id="259"/>
           </p14:sldIdLst>
         </p14:section>
-        <p14:section name="Buses" id="{f4db129f-4b5a-c844-7c71-8cb629fcb13c}">
+        <p14:section name="Buses" id="{2262657a-a7ad-b557-77d0-76e88eee7a2b}">
           <p14:sldIdLst>
             <p14:sldId id="260"/>
             <p14:sldId id="261"/>
@@ -146,14 +146,14 @@
             <p14:sldId id="263"/>
           </p14:sldIdLst>
         </p14:section>
-        <p14:section name="Three-state buffers" id="{08bd7e5d-ddec-260f-449b-14ae4f24b0cb}">
+        <p14:section name="Three-state buffers" id="{8ae040aa-d22a-d6be-2b16-74d05dfba81a}">
           <p14:sldIdLst>
             <p14:sldId id="264"/>
             <p14:sldId id="265"/>
             <p14:sldId id="266"/>
           </p14:sldIdLst>
         </p14:section>
-        <p14:section name="Shift registers" id="{7fb7ed0d-5346-81c4-2240-5ccd804ab5ef}">
+        <p14:section name="Shift registers" id="{e4cb6158-90fb-f444-d832-3444fb66e1b9}">
           <p14:sldIdLst>
             <p14:sldId id="267"/>
             <p14:sldId id="268"/>
@@ -162,7 +162,7 @@
             <p14:sldId id="271"/>
           </p14:sldIdLst>
         </p14:section>
-        <p14:section name="Back to the machine" id="{eec1a4ed-a44c-d9d2-7e76-ceae91651bc6}">
+        <p14:section name="Back to the machine" id="{d4df5eab-b8f7-49bc-bbf4-39e1d243d633}">
           <p14:sldIdLst>
             <p14:sldId id="272"/>
             <p14:sldId id="273"/>

--- a/en/slides/14-Computer_Architecture-Registers_and_Buses.pptx
+++ b/en/slides/14-Computer_Architecture-Registers_and_Buses.pptx
@@ -126,19 +126,19 @@
   <p:extLst>
     <p:ext uri="{521415D9-36F7-43E2-AB2F-B90AF26B5E84}">
       <p14:sectionLst xmlns:p14="http://schemas.microsoft.com/office/powerpoint/2010/main">
-        <p14:section name="Opening" id="{1d267d4f-e471-5873-0964-4ac24fada85e}">
+        <p14:section name="Opening" id="{e70fbac5-af7f-c27f-dd2b-42f01b624d7d}">
           <p14:sldIdLst>
             <p14:sldId id="256"/>
             <p14:sldId id="257"/>
           </p14:sldIdLst>
         </p14:section>
-        <p14:section name="Word gates and registers" id="{ee3a0554-e2ff-8815-e9d6-1cd98a47ad31}">
+        <p14:section name="Word gates and registers" id="{a81f35f3-761d-ac32-b5b0-4a65e9a7695a}">
           <p14:sldIdLst>
             <p14:sldId id="258"/>
             <p14:sldId id="259"/>
           </p14:sldIdLst>
         </p14:section>
-        <p14:section name="Buses" id="{2262657a-a7ad-b557-77d0-76e88eee7a2b}">
+        <p14:section name="Buses" id="{7493c290-2a40-6cb3-fc54-aa8c606aba95}">
           <p14:sldIdLst>
             <p14:sldId id="260"/>
             <p14:sldId id="261"/>
@@ -146,14 +146,14 @@
             <p14:sldId id="263"/>
           </p14:sldIdLst>
         </p14:section>
-        <p14:section name="Three-state buffers" id="{8ae040aa-d22a-d6be-2b16-74d05dfba81a}">
+        <p14:section name="Three-state buffers" id="{a819ab08-7fc6-6de2-75ac-afe791dc9e0a}">
           <p14:sldIdLst>
             <p14:sldId id="264"/>
             <p14:sldId id="265"/>
             <p14:sldId id="266"/>
           </p14:sldIdLst>
         </p14:section>
-        <p14:section name="Shift registers" id="{e4cb6158-90fb-f444-d832-3444fb66e1b9}">
+        <p14:section name="Shift registers" id="{6026d85c-92be-ee5c-0882-3b77eae096cd}">
           <p14:sldIdLst>
             <p14:sldId id="267"/>
             <p14:sldId id="268"/>
@@ -162,7 +162,7 @@
             <p14:sldId id="271"/>
           </p14:sldIdLst>
         </p14:section>
-        <p14:section name="Back to the machine" id="{d4df5eab-b8f7-49bc-bbf4-39e1d243d633}">
+        <p14:section name="Back to the machine" id="{09c91c2a-96fc-dd47-759c-160b428399bc}">
           <p14:sldIdLst>
             <p14:sldId id="272"/>
             <p14:sldId id="273"/>
@@ -574,7 +574,7 @@
           <a:p>
             <a:r>
               <a:rPr lang="en-US" dirty="0"/>
-              <a:t>The previous lecture built a register out of flip-flops. This one asks how registers talk to each other: how a word goes from one to another, along which wires, and what happens when many registers share the same wires. The answers are the bus, the three-state buffer and the shift register. Doc Brown's line on the cover is ironic here: data do need roads, and a bus is exactly that. The warm-up starts from a fact about the kit: its display receives every pixel one bit at a time.
+              <a:t>The previous lecture built a register from flip-flops. This one asks how registers communicate: how a word passes from one to another, along which wires, and what happens when many registers share the same wires. The answers are the bus, the three-state buffer and the shift register, the elementary machines of every datapath. Doc Brown's line on the cover is ironic in this context: data most certainly need roads, and a bus is exactly that. The warm-up starts from a fact about the kit: its display receives every pixel one bit at a time.
 Learning status: UNDERSTAND NOW, by the end of this lecture you explain it, trace it and apply it on your own; USE NOW, you follow and use the recipe today; how it works inside is explained later, or is not part of the course; UNDERSTAND LATER, recognise the name and what it is for; a later lecture explains it. A slide without a badge is context: a story, an example, a question, an exercise.
 Learning status of this lecture. UNDERSTAND NOW: shift registers; registers as flip-flops; buses and three-state gates. USE NOW: the complete program, the PRG32 tools (used, not studied, in this course). UNDERSTAND LATER: memory-mapped I/O (Lecture 15); memories and addresses (Lecture 15). A slide without a badge is context: a story, an example, a question, an exercise.
 For the lecturer: Spiral: the display of the PRG32 kit receives every pixel one bit at a time; the warm-up sends a byte serially in assembly, and the lecture builds the machines that do it in hardware.</a:t>
@@ -665,7 +665,7 @@
           <a:p>
             <a:r>
               <a:rPr lang="en-US" dirty="0"/>
-              <a:t>Applied to a whole word, a three-state gate lets a bus through or disconnects it: when the enable is active the output bus reproduces the input bus; otherwise all its lines are at high impedance. The pins of the chip of the kit work in this way: each can be configured as an output, which drives the wire, or released and used as an input. The joystick pins are inputs; the display pins are outputs.
+              <a:t>Applied to a whole word, a three-state gate either passes a bus through or disconnects it: when enabled, the output bus reproduces the input bus; otherwise all its lines are in high impedance. The pins of the chip of the kit operate in this way: each can be configured as an output, which drives its wire, or released and used as an input. The joystick pins are inputs; the display pins are outputs.
 UNDERSTAND NOW: buses and three-state gates.
 For the lecturer: Tristate di parola. On the kit, the joystick pins are configured as inputs (their output buffers in high impedance) and the display pins as outputs.</a:t>
             </a:r>
@@ -755,7 +755,7 @@
           <a:p>
             <a:r>
               <a:rPr lang="en-US" dirty="0"/>
-              <a:t>The complete scheme of a common bus. Each source register reaches the bus through a three-state buffer with its own enable. The rule is strict: at most one enable is active at a time, so that one source drives the bus and all the others are disconnected. On the other side every destination register is connected to the bus, and only the one whose load signal is active takes the datum. Choosing the source and the destination is the job of decoders driven by the control unit.
+              <a:t>The complete scheme of a common bus. Each source register reaches the bus through a three-state buffer with its own enable. The rule is strict: at most one enable may be active at any time, so that exactly one source drives the bus while all others are disconnected; two active sources would contend for the wire. On the receiving side every destination register is connected to the bus, and only the one whose load signal is active captures the datum. Selecting source and destination is the task of decoders driven by the control unit, which Lecture 18 describes.
 UNDERSTAND NOW: buses and three-state gates.
 For the lecturer: Collegamento di bus: OR di bus; trasferimento verso registri-destinazione. Inside modern chips long shared lines are usually replaced by multiplexers, which do the same selection without high-impedance states; between chips, three-state buses are still the rule.</a:t>
             </a:r>
@@ -845,7 +845,7 @@
           <a:p>
             <a:r>
               <a:rPr lang="en-US" dirty="0"/>
-              <a:t>A shift register is a chain of one-bit cells in which, at every clock pulse, each bit moves to the adjacent cell. Each cell is a D flip-flop whose input is the output of its neighbour. The edge-triggered behaviour of the flip-flop is essential: with transparent latches a bit would run through the whole chain during a single clock pulse. The shift can be in a fixed direction or in a direction chosen by a control line.
+              <a:t>A shift register is a chain of one-bit cells in which, at each clock pulse, every bit moves to the adjacent cell. Each cell is a D flip-flop whose input is the output of its neighbour. The edge-triggered behaviour of the flip-flop is essential: with transparent latches a bit would race through the entire chain during a single clock pulse. The shift may be in a fixed direction or in a direction selected by a control line.
 UNDERSTAND NOW: shift registers.
 For the lecturer: Registri a scorrimento. Edge-triggered flip-flops are essential here: with transparent latches a bit would run through the whole chain in one clock pulse (Lecture 13).</a:t>
             </a:r>
@@ -935,7 +935,7 @@
           <a:p>
             <a:r>
               <a:rPr lang="en-US" dirty="0"/>
-              <a:t>The same chain of flip-flops gives four machines, according to where the data enter and leave. Serial in, serial out: a delay line. Serial in, parallel out: it collects bits arriving one at a time and presents the whole word. Parallel in, serial out: it takes a word and sends it out bit by bit. Parallel in, parallel out, with no shifting, is the ordinary register. The second and the third are the two ends of every serial connection.
+              <a:t>The same chain of flip-flops yields four machines, depending on where data enter and leave. Serial in, serial out: a delay line. Serial in, parallel out: it collects bits arriving one at a time and presents the complete word. Parallel in, serial out: it accepts a word and emits it bit by bit. Parallel in, parallel out, without shifting, is the ordinary register. The second and third are the two ends of every serial connection.
 UNDERSTAND NOW: shift registers.
 For the lecturer: SISO, SIPO, PISO and PIPO. The clock line is not drawn.</a:t>
             </a:r>
@@ -1025,7 +1025,7 @@
           <a:p>
             <a:r>
               <a:rPr lang="en-US" dirty="0"/>
-              <a:t>Two ways of moving a word between registers. In a serial transfer the serial output of one shift register feeds the serial input of another: n clock pulses, one wire. In a parallel transfer the outputs of one register feed the inputs of another: one clock pulse, n wires. The phrase on the right is the trade-off of the whole lecture: moving a word of n bits costs either time or copper.
+              <a:t>Two ways of moving a word between registers. In a serial transfer the serial output of one shift register feeds the serial input of another: n clock pulses, one wire. In a parallel transfer the outputs of one register feed the inputs of another: one clock pulse, n wires. The phrase on the right states the trade-off of the whole lecture: moving an n-bit word costs either time or copper.
 UNDERSTAND NOW: shift registers.
 For the lecturer: Trasferimento seriale (serial input, serial output) and trasferimento parallelo (parallel input, parallel output).</a:t>
             </a:r>
@@ -1115,7 +1115,7 @@
           <a:p>
             <a:r>
               <a:rPr lang="en-US" dirty="0"/>
-              <a:t>A complete serial connection in five steps: the datum is loaded in parallel into a shift register; it is shifted out, one bit per step; the bits travel on a single line; at the other end a second shift register collects them, one per step; and the rebuilt word is passed on in parallel. This is the hardware of the warm-up, and it is how the display of the kit receives every pixel. Every serial standard, from the old serial port to USB, rests on a pair of shift registers.
+              <a:t>A complete serial link in five steps: the datum is loaded in parallel into a shift register; it is shifted out, one bit per step; the bits travel on a single line; at the far end a second shift register collects them, one per step; and the reconstructed word is delivered in parallel. This is the hardware counterpart of the warm-up, and the means by which the display of the kit receives every pixel. Every serial standard, from the historic serial port to USB, rests on a pair of shift registers.
 UNDERSTAND NOW: shift registers.
 For the lecturer: Trasformazione serie-parallelo di un dato. UART, SPI, I2C, I2S and USB all rest on a pair of shift registers, one at each end.</a:t>
             </a:r>
@@ -1205,7 +1205,7 @@
           <a:p>
             <a:r>
               <a:rPr lang="en-US" dirty="0"/>
-              <a:t>Four registers of three bits and a decoder make a small memory. Two address lines choose, through the decoder, one of the four registers; three lines carry the data in and three carry them out. Three control lines complete it: chip select, so that the memory responds only when selected; a line that says read or write; and output enable, which controls three-state outputs so that several memories can share one bus. Nothing here is new: decoder, registers, three-state buffers. The next lecture scales it up.
+              <a:t>Four three-bit registers and a decoder constitute a small memory. Two address lines select, through the decoder, one of the four registers; three lines carry data in and three carry data out. Three control lines complete the design: chip select, so that the memory responds only when selected; a read/write line; and output enable, which controls three-state outputs so that several memories can share one bus. Nothing here is new, only decoder, registers and three-state buffers; the next lecture scales the same structure up to main memory.
 UNDERSTAND NOW: registers as flip-flops. UNDERSTAND LATER: memories and addresses (studied in Lecture 15).
 For the lecturer: Memoria 4 (registri) x 3 (bit): eight inputs (I0-I2, A0-A1, CS, RD, OE) and three outputs. The next lecture scales this up to the main memory.</a:t>
             </a:r>
@@ -1295,8 +1295,8 @@
           <a:p>
             <a:r>
               <a:rPr lang="en-US" dirty="0"/>
-              <a:t>Think of two outputs connected to the same wire, one at 0 and one at 1. A three-state buffer has nothing to do with speed, with storing or with conversion: it disconnects the sources that are not chosen.
-One bit per clock pulse. The alternative, a parallel transfer, would take one pulse and thirty-two wires.
+              <a:t>For the first question one imagines two outputs connected to the same wire, one at 0 and the other at 1. A three-state buffer concerns neither speed, nor storage, nor conversion: it disconnects the sources that have not been selected.
+For the second: one bit per clock pulse. The alternative, a parallel transfer, would take one pulse and thirty-two wires.
 For the lecturer: 1. Answer: B. Several sources share the same lines; all but one must be electrically disconnected (high impedance), otherwise two outputs would fight over the wire.
 2. Answer: C. One bit per pulse: n pulses for n bits. A parallel transfer needs one pulse and n wires.</a:t>
             </a:r>
@@ -1386,7 +1386,7 @@
           <a:p>
             <a:r>
               <a:rPr lang="en-US" dirty="0"/>
-              <a:t>Ten address lines select one word among 2 to the 10; each word has 8 bits. Multiply the two numbers. The first option multiplies the lines instead of using the power.
+              <a:t>Ten address lines select one word among 2^10, and each word has 8 bits; the two numbers are multiplied. The first option multiplies the numbers of lines instead of raising two to the power of the address lines, a frequent error.
 For the lecturer: Answer: C. 2^10 = 1,024 words of 8 bits: 8,192 bits, that is 1 KiB.</a:t>
             </a:r>
             <a:endParaRPr lang="en-US" dirty="0"/>
@@ -1475,7 +1475,7 @@
           <a:p>
             <a:r>
               <a:rPr lang="en-US" dirty="0"/>
-              <a:t>Ten terms. Three-state, or tri-state, is a tre stati; high impedance is alta impedenza. A shift register is a registro a scorrimento. Load and strobe indicate the signal that makes a register take its input. Chip select is the line that chooses which device on a shared bus must respond.</a:t>
+              <a:t>Ten terms. Three-state, or tri-state, is a tre stati; high impedance is alta impedenza. A shift register is a registro a scorrimento. Load and strobe denote the signal that causes a register to capture its input. Chip select is the line that designates which device on a shared bus must respond.</a:t>
             </a:r>
             <a:endParaRPr lang="en-US" dirty="0"/>
           </a:p>
@@ -1563,7 +1563,7 @@
           <a:p>
             <a:r>
               <a:rPr lang="en-US" dirty="0"/>
-              <a:t>Five objectives. Describe a register as a set of flip-flops with a common clock and a load signal. Explain what a bus is and compare dedicated buses with a common bus. Say why a common bus needs three-state buffers and what high impedance means. Describe a shift register and its four combinations of serial and parallel input and output. And convert a datum from parallel to serial and back, in hardware and in assembly.</a:t>
+              <a:t>Five learning outcomes. Describing a register as a set of flip-flops with a common clock and a load signal. Explaining what a bus is and comparing dedicated buses with a common bus. Stating why a common bus requires three-state buffers and what high impedance means. Describing a shift register and its four combinations of serial and parallel input and output. And converting a datum from parallel to serial form and back, both in hardware and in assembly.</a:t>
             </a:r>
             <a:endParaRPr lang="en-US" dirty="0"/>
           </a:p>
@@ -1651,7 +1651,7 @@
           <a:p>
             <a:r>
               <a:rPr lang="en-US" dirty="0"/>
-              <a:t>Five conclusions. A register is a form of memory with an elementary way of working. Registers are read and written through buses. A common bus needs three-state circuits: 0, 1 and disconnected. Data travel serially or in parallel, and shift registers convert between the two. And a decoder in front of a group of registers makes a memory, which is the subject of the next lecture.
+              <a:t>Five conclusions. A register is a form of memory with an elementary mode of operation. Registers are read and written through buses. A common bus requires three-state circuits: 0, 1 and disconnected. Data travel serially or in parallel, and shift registers convert between the two forms. And a decoder placed in front of a group of registers constitutes a memory, which is the subject of the next lecture.
 Learning status, recap. UNDERSTAND NOW: shift registers; registers as flip-flops; buses and three-state gates. USE NOW: the complete program, the PRG32 tools (used, not studied, in this course). UNDERSTAND LATER: memory-mapped I/O (Lecture 15); memories and addresses (Lecture 15). A slide without a badge is context: a story, an example, a question, an exercise.
 For the lecturer: Next lecture: memory.</a:t>
             </a:r>
@@ -1741,7 +1741,7 @@
           <a:p>
             <a:r>
               <a:rPr lang="en-US" dirty="0"/>
-              <a:t>A word is a vector of n bits. A word gate is n identical gates that share one control input: with the control at 1 the word passes unchanged, with the control at 0 every bit is forced to 0. It is the natural extension of a gate from one bit to a word. The bitwise instructions of RISC-V are word gates thirty-two bits wide, and the multiplexer on words of Lecture 11 is built from them.
+              <a:t>A word is a vector of n bits. A word gate consists of n identical gates sharing one control input: with the control at 1 the word passes unchanged, with the control at 0 every bit is forced to 0. It is the natural generalisation of a gate from a bit to a word. The bitwise instructions of RISC-V are word gates thirty-two bits wide, and the word multiplexer of Lecture 11 is built from them.
 UNDERSTAND NOW: registers as flip-flops.
 For the lecturer: Porte di parola. The multiplexer on words of Lecture 11 is built from word gates.</a:t>
             </a:r>
@@ -1831,7 +1831,7 @@
           <a:p>
             <a:r>
               <a:rPr lang="en-US" dirty="0"/>
-              <a:t>A register stores a group of bits: in its simplest form it is a group of flip-flops with a common clock. The classic example in one chip is the 74273, with eight D flip-flops, one clock and one clear. Loading a register means storing the datum present on its inputs, and it happens when the load signal is active, normally in step with the clock. Each of the registers x1 to x31 of RISC-V is thirty-two such flip-flops.
+              <a:t>A register stores a group of bits; in its simplest form it is a group of flip-flops with a common clock. The classic single-chip example is the 74273, with eight D flip-flops, one clock and one clear input. Loading a register means storing the datum present at its inputs, which occurs when the load signal is active, normally in synchrony with the clock. Each of the RISC-V registers x1 to x31 consists of thirty-two such flip-flops.
 UNDERSTAND NOW: registers as flip-flops.
 For the lecturer: Datasheet: ti.com/lit/ds/symlink/sn74ls273.pdf. The 7474 holds two D flip-flops with preset and clear. See Lecture 13 for the flip-flop itself.
 Pictures: Animation Technologies LifeView LR25 - Hitachi LS273-2523.jpg, Raimond Spekking, CC BY-SA 4.0, Wikimedia Commons.</a:t>
@@ -1922,7 +1922,7 @@
           <a:p>
             <a:r>
               <a:rPr lang="en-US" dirty="0"/>
-              <a:t>A bus is the set of lines that carries a datum between the components of a system. The word comes from the Latin omnibus, "for all". A bus of n lines carries a word of n bits in one step. The transfer from a register X to a register Y is the elementary action from which everything else is built: almost every instruction you have written is, underneath, a short sequence of register transfers.
+              <a:t>A bus is the set of lines that carries a datum between the components of a system; the word derives from the Latin omnibus, "for all". A bus of n lines carries an n-bit word in one step. The transfer from a register X to a register Y is the elementary action from which all others are composed: almost every instruction written so far is, at the level of the hardware, a short sequence of register transfers, a description known as register-transfer level.
 UNDERSTAND NOW: buses and three-state gates.
 For the lecturer: Almost every instruction of Lecture 02 is, at bottom, a sequence of register transfers.</a:t>
             </a:r>
@@ -2012,7 +2012,7 @@
           <a:p>
             <a:r>
               <a:rPr lang="en-US" dirty="0"/>
-              <a:t>Two ways of connecting registers. With dedicated buses each possible transfer has its own lines: several transfers can happen at once, but the wires grow with the square of the number of registers. With a common bus one path serves all the transfers: each time one source and one destination are chosen, and a transfer takes two steps, from the source to the bus and from the bus to the destination. It is cheap and widespread, at the price of doing one transfer at a time.
+              <a:t>Two ways of interconnecting registers. With dedicated buses each possible transfer has its own lines: several transfers may occur simultaneously, but the wiring grows with the square of the number of registers. With a common bus a single path serves every transfer: on each occasion one source and one destination are selected, and a transfer takes two steps, from the source onto the bus and from the bus into the destination. It is economical and widespread, at the price of performing one transfer at a time. The choice is an archetypal trade-off between cost and parallelism.
 UNDERSTAND NOW: buses and three-state gates.
 For the lecturer: Intermediate solutions exist: several buses, each shared by a group of registers. Real processors use them.</a:t>
             </a:r>
@@ -2102,7 +2102,7 @@
           <a:p>
             <a:r>
               <a:rPr lang="en-US" dirty="0"/>
-              <a:t>A transfer can be parallel, with the n bits travelling together on n lines in one step, or serial, with the bits travelling one after another on a single line in n steps, or a mixture, for example one byte at a time. Remember the last line: inside a chip buses are parallel; between chips and between machines they are today almost always serial, because at very high speed it is easier to keep one line clean than thirty-two lines in step.
+              <a:t>A transfer may be parallel, with the n bits travelling together on n lines in one step; serial, with the bits travelling in sequence on one line over n steps; or mixed, for example one byte at a time. The last line records a significant trend: within a chip buses are parallel, whereas between chips and between machines they are today almost invariably serial, because at very high speed it is easier to keep one line clean than to keep thirty-two lines synchronised.
 UNDERSTAND NOW: buses and three-state gates.
 For the lecturer: USB, SATA, PCI Express, HDMI and Ethernet are all serial: at very high speeds it is easier to keep one fast line clean than to keep thirty-two lines in step.
 Pictures: Hand Etched PCB.png, Tpdwkouaa, CC BY-SA 4.0, Wikimedia Commons.</a:t>
@@ -2193,7 +2193,7 @@
           <a:p>
             <a:r>
               <a:rPr lang="en-US" dirty="0"/>
-              <a:t>The two halves of a transfer on a common bus. On the left, from the bus to a register: the datum on the bus is loaded into R when the load signal is active. On the right, from a register to the bus: the outputs of R reach the bus through a buffer, and only while the enable signal is active. The question at the bottom leads to the next section: when the enable is not active, what must the output of the buffer be, so as not to disturb the bus?
+              <a:t>The two halves of a transfer on a common bus. On the left, from the bus into a register: the datum on the bus is loaded into R when the load signal is active. On the right, from a register onto the bus: the outputs of R reach the bus through a buffer, and only while the enable signal is active. The question at the bottom introduces the next section: when the enable is inactive, what must the output of the buffer be in order not to disturb the bus?
 UNDERSTAND NOW: buses and three-state gates.
 For the lecturer: Trasferimento dati su bus unico: caricamento di un registro (da bus a registro) and trasferimento da registro a bus.</a:t>
             </a:r>
@@ -2283,7 +2283,7 @@
           <a:p>
             <a:r>
               <a:rPr lang="en-US" dirty="0"/>
-              <a:t>A three-state output has a third condition besides 0 and 1: high impedance, written z, in which the output is electrically disconnected from the wire. An enable input decides: when it is 1 the gate works normally, when it is 0 the output is z. The table shows it for an AND with enable: four rows of an ordinary AND, and a last row in which the output floats whatever the inputs. Electrically, both transistors of the output stage are switched off.
+              <a:t>A three-state output has a third condition besides 0 and 1: high impedance, written z, in which the output is electrically disconnected from the wire. An enable input decides: when it is 1 the gate operates normally, when it is 0 the output is z. The table shows this for an AND with enable: four rows of an ordinary AND, and a final row in which the output floats regardless of the inputs. Electrically, both transistors of the output stage are switched off.
 UNDERSTAND NOW: buses and three-state gates.
 For the lecturer: AND tristate; segnale di abilitazione in logica 1-attiva. Electrically, both output transistors are switched off.</a:t>
             </a:r>
@@ -3363,7 +3363,7 @@
                 <a:ea typeface="Calibri" pitchFamily="34" charset="-122"/>
                 <a:cs typeface="Calibri" pitchFamily="34" charset="-120"/>
               </a:rPr>
-              <a:t>14-Computer_Architecture-Registers_and_Buses-Code.pptx</a:t>
+              <a:t>14-Computer_Architecture-Registers_and_Buses-Lab.pptx</a:t>
             </a:r>
             <a:endParaRPr lang="en-US" sz="1300" dirty="0"/>
           </a:p>

--- a/en/slides/14-Computer_Architecture-Registers_and_Buses.pptx
+++ b/en/slides/14-Computer_Architecture-Registers_and_Buses.pptx
@@ -126,19 +126,19 @@
   <p:extLst>
     <p:ext uri="{521415D9-36F7-43E2-AB2F-B90AF26B5E84}">
       <p14:sectionLst xmlns:p14="http://schemas.microsoft.com/office/powerpoint/2010/main">
-        <p14:section name="Opening" id="{e70fbac5-af7f-c27f-dd2b-42f01b624d7d}">
+        <p14:section name="Opening" id="{b71897d4-ba00-219d-8ac1-18c3f11b3912}">
           <p14:sldIdLst>
             <p14:sldId id="256"/>
             <p14:sldId id="257"/>
           </p14:sldIdLst>
         </p14:section>
-        <p14:section name="Word gates and registers" id="{a81f35f3-761d-ac32-b5b0-4a65e9a7695a}">
+        <p14:section name="Word gates and registers" id="{3134bd41-e6b3-37d1-644e-0b38207175ac}">
           <p14:sldIdLst>
             <p14:sldId id="258"/>
             <p14:sldId id="259"/>
           </p14:sldIdLst>
         </p14:section>
-        <p14:section name="Buses" id="{7493c290-2a40-6cb3-fc54-aa8c606aba95}">
+        <p14:section name="Buses" id="{38eff3c6-9625-fd1b-3f14-26df481954c0}">
           <p14:sldIdLst>
             <p14:sldId id="260"/>
             <p14:sldId id="261"/>
@@ -146,14 +146,14 @@
             <p14:sldId id="263"/>
           </p14:sldIdLst>
         </p14:section>
-        <p14:section name="Three-state buffers" id="{a819ab08-7fc6-6de2-75ac-afe791dc9e0a}">
+        <p14:section name="Three-state buffers" id="{7d4759dc-8827-5704-797c-8bcc52a9dc6d}">
           <p14:sldIdLst>
             <p14:sldId id="264"/>
             <p14:sldId id="265"/>
             <p14:sldId id="266"/>
           </p14:sldIdLst>
         </p14:section>
-        <p14:section name="Shift registers" id="{6026d85c-92be-ee5c-0882-3b77eae096cd}">
+        <p14:section name="Shift registers" id="{0166f996-0035-65b3-32e0-bdd14ef99969}">
           <p14:sldIdLst>
             <p14:sldId id="267"/>
             <p14:sldId id="268"/>
@@ -162,7 +162,7 @@
             <p14:sldId id="271"/>
           </p14:sldIdLst>
         </p14:section>
-        <p14:section name="Back to the machine" id="{09c91c2a-96fc-dd47-759c-160b428399bc}">
+        <p14:section name="Back to the machine" id="{78fdaa04-aea5-22ae-c29e-c838e58ad0b9}">
           <p14:sldIdLst>
             <p14:sldId id="272"/>
             <p14:sldId id="273"/>

--- a/en/slides/14-Computer_Architecture-Registers_and_Buses.pptx
+++ b/en/slides/14-Computer_Architecture-Registers_and_Buses.pptx
@@ -126,19 +126,19 @@
   <p:extLst>
     <p:ext uri="{521415D9-36F7-43E2-AB2F-B90AF26B5E84}">
       <p14:sectionLst xmlns:p14="http://schemas.microsoft.com/office/powerpoint/2010/main">
-        <p14:section name="Opening" id="{b71897d4-ba00-219d-8ac1-18c3f11b3912}">
+        <p14:section name="Opening" id="{e2ff295a-562f-2785-ac87-58101581765b}">
           <p14:sldIdLst>
             <p14:sldId id="256"/>
             <p14:sldId id="257"/>
           </p14:sldIdLst>
         </p14:section>
-        <p14:section name="Word gates and registers" id="{3134bd41-e6b3-37d1-644e-0b38207175ac}">
+        <p14:section name="Word gates and registers" id="{330b5259-675a-0249-d83c-bf7075adbe1b}">
           <p14:sldIdLst>
             <p14:sldId id="258"/>
             <p14:sldId id="259"/>
           </p14:sldIdLst>
         </p14:section>
-        <p14:section name="Buses" id="{38eff3c6-9625-fd1b-3f14-26df481954c0}">
+        <p14:section name="Buses" id="{98390e40-1fce-99a5-b205-eab15bfbdd4d}">
           <p14:sldIdLst>
             <p14:sldId id="260"/>
             <p14:sldId id="261"/>
@@ -146,14 +146,14 @@
             <p14:sldId id="263"/>
           </p14:sldIdLst>
         </p14:section>
-        <p14:section name="Three-state buffers" id="{7d4759dc-8827-5704-797c-8bcc52a9dc6d}">
+        <p14:section name="Three-state buffers" id="{0614663a-9531-9f92-573f-a8551abd2b12}">
           <p14:sldIdLst>
             <p14:sldId id="264"/>
             <p14:sldId id="265"/>
             <p14:sldId id="266"/>
           </p14:sldIdLst>
         </p14:section>
-        <p14:section name="Shift registers" id="{0166f996-0035-65b3-32e0-bdd14ef99969}">
+        <p14:section name="Shift registers" id="{f34f36a2-f586-8e93-37d5-43f05a7e280b}">
           <p14:sldIdLst>
             <p14:sldId id="267"/>
             <p14:sldId id="268"/>
@@ -162,7 +162,7 @@
             <p14:sldId id="271"/>
           </p14:sldIdLst>
         </p14:section>
-        <p14:section name="Back to the machine" id="{78fdaa04-aea5-22ae-c29e-c838e58ad0b9}">
+        <p14:section name="Back to the machine" id="{9f0e5f60-6ca6-3e51-6e9d-98787e2bc61f}">
           <p14:sldIdLst>
             <p14:sldId id="272"/>
             <p14:sldId id="273"/>
@@ -577,6 +577,7 @@
               <a:t>The previous lecture built a register from flip-flops. This one asks how registers communicate: how a word passes from one to another, along which wires, and what happens when many registers share the same wires. The answers are the bus, the three-state buffer and the shift register, the elementary machines of every datapath. Doc Brown's line on the cover is ironic in this context: data most certainly need roads, and a bus is exactly that. The warm-up starts from a fact about the kit: its display receives every pixel one bit at a time.
 Learning status: UNDERSTAND NOW, by the end of this lecture you explain it, trace it and apply it on your own; USE NOW, you follow and use the recipe today; how it works inside is explained later, or is not part of the course; UNDERSTAND LATER, recognise the name and what it is for; a later lecture explains it. A slide without a badge is context: a story, an example, a question, an exercise.
 Learning status of this lecture. UNDERSTAND NOW: shift registers; registers as flip-flops; buses and three-state gates. USE NOW: the complete program, the PRG32 tools (used, not studied, in this course). UNDERSTAND LATER: memory-mapped I/O (Lecture 15); memories and addresses (Lecture 15). A slide without a badge is context: a story, an example, a question, an exercise.
+Roadmap. Today's outcomes: (1) explain how registers share a bus through three-state buffers; (2) use a shift register for serial transfer. Builds on: registers as flip-flops (Lecture 13). Next: Lecture 15, Memory.
 For the lecturer: Spiral: the display of the PRG32 kit receives every pixel one bit at a time; the warm-up sends a byte serially in assembly, and the lecture builds the machines that do it in hardware.</a:t>
             </a:r>
             <a:endParaRPr lang="en-US" dirty="0"/>
@@ -1652,7 +1653,7 @@
             <a:r>
               <a:rPr lang="en-US" dirty="0"/>
               <a:t>Five conclusions. A register is a form of memory with an elementary mode of operation. Registers are read and written through buses. A common bus requires three-state circuits: 0, 1 and disconnected. Data travel serially or in parallel, and shift registers convert between the two forms. And a decoder placed in front of a group of registers constitutes a memory, which is the subject of the next lecture.
-Learning status, recap. UNDERSTAND NOW: shift registers; registers as flip-flops; buses and three-state gates. USE NOW: the complete program, the PRG32 tools (used, not studied, in this course). UNDERSTAND LATER: memory-mapped I/O (Lecture 15); memories and addresses (Lecture 15). A slide without a badge is context: a story, an example, a question, an exercise.
+Learning status, recap. UNDERSTAND NOW: shift registers; registers as flip-flops; buses and three-state gates. USE NOW: the complete program, the PRG32 tools (used, not studied, in this course). UNDERSTAND LATER: memory-mapped I/O (Lecture 15); memories and addresses (Lecture 15). A slide without a badge is context: a story, an example, a question, an exercise. Closing thread: A bus is a road that only one register may drive at a time, and a shift register turns a word into a stream of bits: the display of the kit receives its pixels this way. Next: memory. Exit ticket (two to four minutes, alone, on paper): 1. Three registers share a common bus. What happens if two of them drive it at the same time, and which component prevents it? 2. An 8-bit word is sent serially, one bit per clock pulse. How many pulses does it take, and what does the shift register do at each?
 For the lecturer: Next lecture: memory.</a:t>
             </a:r>
             <a:endParaRPr lang="en-US" dirty="0"/>
